--- a/slaydlar/M4.pptx
+++ b/slaydlar/M4.pptx
@@ -22,7 +22,6 @@
     <p:sldId id="270" r:id="rId22"/>
     <p:sldId id="271" r:id="rId23"/>
     <p:sldId id="272" r:id="rId24"/>
-    <p:sldId id="273" r:id="rId25"/>
   </p:sldIdLst>
   <p:sldSz cx="12192000" cy="6858000" type="screen4x3"/>
   <p:notesSz cx="6858000" cy="9144000"/>
@@ -909,112 +908,6 @@
 </file>
 
 <file path=ppt/notesSlides/notesSlide6.xml><?xml version="1.0" encoding="utf-8"?>
-<p:notes xmlns:a="http://schemas.openxmlformats.org/drawingml/2006/main" xmlns:p="http://schemas.openxmlformats.org/presentationml/2006/main" xmlns:r="http://schemas.openxmlformats.org/officeDocument/2006/relationships">
-  <p:cSld>
-    <p:spTree>
-      <p:nvGrpSpPr>
-        <p:cNvPr id="1" name=""/>
-        <p:cNvGrpSpPr/>
-        <p:nvPr/>
-      </p:nvGrpSpPr>
-      <p:grpSpPr>
-        <a:xfrm>
-          <a:off x="0" y="0"/>
-          <a:ext cx="0" cy="0"/>
-          <a:chOff x="0" y="0"/>
-          <a:chExt cx="0" cy="0"/>
-        </a:xfrm>
-      </p:grpSpPr>
-      <p:sp>
-        <p:nvSpPr>
-          <p:cNvPr id="2" name="Slide Image Placeholder 1"/>
-          <p:cNvSpPr>
-            <a:spLocks noGrp="1"/>
-          </p:cNvSpPr>
-          <p:nvPr>
-            <p:ph type="sldImg" idx="2"/>
-          </p:nvPr>
-        </p:nvSpPr>
-        <p:spPr/>
-      </p:sp>
-      <p:sp>
-        <p:nvSpPr>
-          <p:cNvPr id="3" name="Notes Placeholder 2"/>
-          <p:cNvSpPr>
-            <a:spLocks noGrp="1"/>
-          </p:cNvSpPr>
-          <p:nvPr>
-            <p:ph type="body" idx="3" sz="quarter"/>
-          </p:nvPr>
-        </p:nvSpPr>
-        <p:spPr/>
-        <p:txBody>
-          <a:bodyPr/>
-          <a:lstStyle/>
-          <a:p>
-            <a:r>
-              <a:t>Sze va hammualliflar [4] hamda Hennessy va Patterson [1] asosida SI chipi loyihalashning oltita tamoyilini ajratish mumkin.</a:t>
-            </a:r>
-          </a:p>
-          <a:p/>
-          <a:p>
-            <a:r>
-              <a:t>1. Ma'lumot oqimi (dataflow) ni tanlash. PE massivida qaysi ma'lumot joyida turadi va qaysi biri harakatlanadi — loyihaning markaziy qarori. Og'irlik-statsionar (weight-stationary, TPU): og'irliklar PE larga yuklanadi va ko'p kirish ustida qayta ishlatiladi; katta paketda samarali. Chiqish-statsionar (output-stationary): har PE bitta chiqish elementini to'playdi, qisman yig'indilar harakatlanmaydi. Kirish-statsionar va satr-statsionar (row-stationary, MIT Eyeriss chipi): konvolyutsiya satrlari PE larda saqlanib, uch turdagi qayta ishlatish muvozanatlanadi. To'g'ri tanlov yukning shakliga bog'liq: LLM inferensida (kichik paket, katta og'irliklar) og'irlik-statsionar oqim og'irliklarni qayta ishlata olmaydi va xotira o'tkazuvchanligi chegara bo'ladi — shuning uchun Groq butun modelni SRAM da saqlaydi.</a:t>
-            </a:r>
-          </a:p>
-          <a:p/>
-          <a:p>
-            <a:r>
-              <a:t>2. Xotira iyerarxiyasi va energiya byudjeti. DRAM murojaati SRAM dan 100 baravar qimmat; loyihaning maqsadi — har DRAM murojaati uchun maksimal amal (arifmetik intensivlik). Buning vositalari: katta on-chip SRAM (Cerebras 44 GB, Graphcore 900 MB, H100 50 MB L2), HBM (3D qatlamli DRAM, chip yoniga 2.5D interpozer orqali ulanadi; HBM3e stek boshiga 1 TB/s dan ortiq), plitkalash (tiling) va qayta ishlatish. Muhandis «TOPS» ni emas, «TOPS/W» va «TOPS/mm²» ni optimallashtiradi.</a:t>
-            </a:r>
-          </a:p>
-          <a:p/>
-          <a:p>
-            <a:r>
-              <a:t>3. Aniqlikni kamaytirish. Har ikki baravar kam bit — ko'paytirgich maydoni taxminan 4 baravar kichik (ko'paytirgich murakkabligi bit kengligi kvadratiga proporsional), xotira va o'tkazuvchanlik 2 baravar tejaladi. Shuning uchun avlodlar FP32 → FP16/BF16 → INT8 → FP8 → FP4 yo'lidan bordi; chip loyihasida bu bir vaqtning o'zida bir nechta formatni qo'llab-quvvatlovchi va ularni birlashtira oladigan ko'paytirgichlarni talab qiladi.</a:t>
-            </a:r>
-          </a:p>
-          <a:p/>
-          <a:p>
-            <a:r>
-              <a:t>4. Siyraklik. Neyron tarmoqda nollar ko'p (ReLU dan keyin aktivatsiyalar, kesilgan og'irliklar). Apparat nollarni o'tkazib yuborsa (zero-skipping) yoki strukturali siyraklikni (2:4) qo'llasa, samarali o'tkazuvchanlik oshadi; narxi — indekslarni saqlash va murakkabroq rejalashtirish.</a:t>
-            </a:r>
-          </a:p>
-          <a:p/>
-          <a:p>
-            <a:r>
-              <a:t>5. Masshtablash va interkonnekt. Bitta kristall o'lchami litografiya chegarasi (~858 mm²) bilan cheklangan. Yechimlar: chiplet — bir nechta kichik kristallni bitta paketda birlashtirish (AMD MI300X 8 ta hisoblash chipleti + 4 ta kiritish-chiqarish chipleti, NVIDIA Blackwell 2 kristall 10 TB/s ko'prik bilan; UCIe ochiq standarti 2022), wafer miqyosi (Cerebras), chipdan tashqarida NVLink/NVSwitch, ICI (TPU 3D torus), optik interkonnekt (co-packaged optics — yaqin kelajak).</a:t>
-            </a:r>
-          </a:p>
-          <a:p/>
-          <a:p>
-            <a:r>
-              <a:t>6. Dasturiy stek bilan birgalikda loyihalash. Chip kompilyatorsiz foydasiz. TPU — XLA bilan, Tensor Core — cuBLAS/cuDNN/CUTLASS bilan, NPU lar — o'z SDK lari bilan birga loyihalanadi. Bugungi kunda MLIR va OpenXLA kabi umumiy kompilyator infratuzilmalari yangi chip uchun dasturiy stek yaratish vaqtini qisqartirmoqda; Triton esa yadro yozishni demokratlashtirmoqda.</a:t>
-            </a:r>
-          </a:p>
-        </p:txBody>
-      </p:sp>
-      <p:sp>
-        <p:nvSpPr>
-          <p:cNvPr id="4" name="Slide Number Placeholder 3"/>
-          <p:cNvSpPr>
-            <a:spLocks noGrp="1"/>
-          </p:cNvSpPr>
-          <p:nvPr>
-            <p:ph type="sldNum" idx="5" sz="quarter"/>
-          </p:nvPr>
-        </p:nvSpPr>
-        <p:spPr/>
-      </p:sp>
-    </p:spTree>
-  </p:cSld>
-  <p:clrMapOvr>
-    <a:masterClrMapping/>
-  </p:clrMapOvr>
-</p:notes>
-</file>
-
-<file path=ppt/notesSlides/notesSlide7.xml><?xml version="1.0" encoding="utf-8"?>
 <p:notes xmlns:a="http://schemas.openxmlformats.org/drawingml/2006/main" xmlns:p="http://schemas.openxmlformats.org/presentationml/2006/main" xmlns:r="http://schemas.openxmlformats.org/officeDocument/2006/relationships">
   <p:cSld>
     <p:spTree>
@@ -8083,12 +7976,12 @@
         </p:nvSpPr>
         <p:spPr>
           <a:xfrm>
-            <a:off x="550000" y="1620000"/>
-            <a:ext cx="11100000" cy="1250000"/>
+            <a:off x="550000" y="1409780"/>
+            <a:ext cx="11100000" cy="1503480"/>
           </a:xfrm>
           <a:prstGeom prst="roundRect">
             <a:avLst>
-              <a:gd name="adj" fmla="val 18000"/>
+              <a:gd name="adj" fmla="val 8000"/>
             </a:avLst>
           </a:prstGeom>
           <a:solidFill>
@@ -8129,8 +8022,8 @@
         </p:nvSpPr>
         <p:spPr>
           <a:xfrm>
-            <a:off x="550000" y="1620000"/>
-            <a:ext cx="70000" cy="1250000"/>
+            <a:off x="550000" y="1409780"/>
+            <a:ext cx="70000" cy="1503480"/>
           </a:xfrm>
           <a:prstGeom prst="rect">
             <a:avLst/>
@@ -8173,8 +8066,8 @@
         </p:nvSpPr>
         <p:spPr>
           <a:xfrm>
-            <a:off x="800000" y="2015000"/>
-            <a:ext cx="460000" cy="460000"/>
+            <a:off x="780000" y="1951520"/>
+            <a:ext cx="420000" cy="420000"/>
           </a:xfrm>
           <a:prstGeom prst="ellipse">
             <a:avLst/>
@@ -8207,7 +8100,7 @@
           <a:p>
             <a:pPr algn="ctr"/>
             <a:r>
-              <a:rPr sz="1600" b="1">
+              <a:rPr sz="1400" b="1">
                 <a:solidFill>
                   <a:srgbClr val="FFFFFF"/>
                 </a:solidFill>
@@ -8226,8 +8119,8 @@
         </p:nvSpPr>
         <p:spPr>
           <a:xfrm>
-            <a:off x="1450000" y="1620000"/>
-            <a:ext cx="10050000" cy="1250000"/>
+            <a:off x="1380000" y="1449780"/>
+            <a:ext cx="10150000" cy="1423480"/>
           </a:xfrm>
           <a:prstGeom prst="rect">
             <a:avLst/>
@@ -8235,20 +8128,19 @@
           <a:noFill/>
         </p:spPr>
         <p:txBody>
-          <a:bodyPr wrap="square" anchor="ctr" lIns="50800" rIns="50800">
+          <a:bodyPr wrap="square" anchor="ctr">
             <a:spAutoFit/>
           </a:bodyPr>
           <a:lstStyle/>
           <a:p>
-            <a:pPr algn="l"/>
             <a:r>
-              <a:rPr sz="1600" b="0">
+              <a:rPr sz="1400" b="0">
                 <a:solidFill>
                   <a:srgbClr val="1B2430"/>
                 </a:solidFill>
                 <a:latin typeface="Calibri"/>
               </a:rPr>
-              <a:t>RISC-V — 2010-yilda Kaliforniya universiteti Berklida yaratilgan va hozir RISC-V International (Shveytsariya) tomonidan boshqariladigan ochiq buyruqlar to'plami arxitekturasi (Instruction Set Architecture, ISA). x86 (Intel/AMD) va ARM dan farqli o'laroq,…</a:t>
+              <a:t>RISC-V — 2010-yilda Kaliforniya universiteti Berklida yaratilgan va hozir RISC-V International (Shveytsariya) tomonidan boshqariladigan ochiq buyruqlar to'plami arxitekturasi (Instruction Set Architecture, ISA). x86 (Intel/AMD) va ARM dan farqli o'laroq…</a:t>
             </a:r>
           </a:p>
         </p:txBody>
@@ -8261,12 +8153,12 @@
         </p:nvSpPr>
         <p:spPr>
           <a:xfrm>
-            <a:off x="550000" y="2990000"/>
-            <a:ext cx="11100000" cy="1250000"/>
+            <a:off x="550000" y="3023260"/>
+            <a:ext cx="11100000" cy="1503480"/>
           </a:xfrm>
           <a:prstGeom prst="roundRect">
             <a:avLst>
-              <a:gd name="adj" fmla="val 18000"/>
+              <a:gd name="adj" fmla="val 8000"/>
             </a:avLst>
           </a:prstGeom>
           <a:solidFill>
@@ -8307,8 +8199,8 @@
         </p:nvSpPr>
         <p:spPr>
           <a:xfrm>
-            <a:off x="550000" y="2990000"/>
-            <a:ext cx="70000" cy="1250000"/>
+            <a:off x="550000" y="3023260"/>
+            <a:ext cx="70000" cy="1503480"/>
           </a:xfrm>
           <a:prstGeom prst="rect">
             <a:avLst/>
@@ -8351,8 +8243,8 @@
         </p:nvSpPr>
         <p:spPr>
           <a:xfrm>
-            <a:off x="800000" y="3385000"/>
-            <a:ext cx="460000" cy="460000"/>
+            <a:off x="780000" y="3565000"/>
+            <a:ext cx="420000" cy="420000"/>
           </a:xfrm>
           <a:prstGeom prst="ellipse">
             <a:avLst/>
@@ -8385,7 +8277,7 @@
           <a:p>
             <a:pPr algn="ctr"/>
             <a:r>
-              <a:rPr sz="1600" b="1">
+              <a:rPr sz="1400" b="1">
                 <a:solidFill>
                   <a:srgbClr val="FFFFFF"/>
                 </a:solidFill>
@@ -8404,8 +8296,8 @@
         </p:nvSpPr>
         <p:spPr>
           <a:xfrm>
-            <a:off x="1450000" y="2990000"/>
-            <a:ext cx="10050000" cy="1250000"/>
+            <a:off x="1380000" y="3063260"/>
+            <a:ext cx="10150000" cy="1423480"/>
           </a:xfrm>
           <a:prstGeom prst="rect">
             <a:avLst/>
@@ -8413,20 +8305,35 @@
           <a:noFill/>
         </p:spPr>
         <p:txBody>
-          <a:bodyPr wrap="square" anchor="ctr" lIns="50800" rIns="50800">
+          <a:bodyPr wrap="square" anchor="ctr">
             <a:spAutoFit/>
           </a:bodyPr>
           <a:lstStyle/>
           <a:p>
-            <a:pPr algn="l"/>
             <a:r>
-              <a:rPr sz="1600" b="0">
+              <a:rPr sz="1500" b="1">
                 <a:solidFill>
-                  <a:srgbClr val="1B2430"/>
+                  <a:srgbClr val="1F3A5F"/>
                 </a:solidFill>
                 <a:latin typeface="Calibri"/>
               </a:rPr>
-              <a:t>SI chiplari uchun RISC-V ning jozibasi uch jihatda. Birinchidan, vektor kengaytmasi uzunlikka bog'liq emas (vector-length agnostic): bitta kod 128 bitli chekka yadroda ham, 2048 bitli server yadrosida ham ishlaydi — SIMD ning AVX2/AVX-512 kabi qattiq…</a:t>
+              <a:t>SI chiplari uchun RISC-V ning jozibasi uch jihatda.</a:t>
+            </a:r>
+          </a:p>
+          <a:p>
+            <a:pPr>
+              <a:spcBef>
+                <a:spcPts val="400"/>
+              </a:spcBef>
+            </a:pPr>
+            <a:r>
+              <a:rPr sz="1400">
+                <a:solidFill>
+                  <a:srgbClr val="334055"/>
+                </a:solidFill>
+                <a:latin typeface="Calibri"/>
+              </a:rPr>
+              <a:t>Birinchidan, vektor kengaytmasi uzunlikka bog'liq emas (vector-length agnostic): bitta kod 128 bitli chekka yadroda ham, 2048 bitli server yadrosida ham ishlaydi — SIMD ning AVX2/AVX-512 kabi qattiq kengliklaridan farqli.</a:t>
             </a:r>
           </a:p>
         </p:txBody>
@@ -8439,12 +8346,12 @@
         </p:nvSpPr>
         <p:spPr>
           <a:xfrm>
-            <a:off x="550000" y="4360000"/>
-            <a:ext cx="11100000" cy="1250000"/>
+            <a:off x="550000" y="4636740"/>
+            <a:ext cx="11100000" cy="1503480"/>
           </a:xfrm>
           <a:prstGeom prst="roundRect">
             <a:avLst>
-              <a:gd name="adj" fmla="val 18000"/>
+              <a:gd name="adj" fmla="val 8000"/>
             </a:avLst>
           </a:prstGeom>
           <a:solidFill>
@@ -8485,8 +8392,8 @@
         </p:nvSpPr>
         <p:spPr>
           <a:xfrm>
-            <a:off x="550000" y="4360000"/>
-            <a:ext cx="70000" cy="1250000"/>
+            <a:off x="550000" y="4636740"/>
+            <a:ext cx="70000" cy="1503480"/>
           </a:xfrm>
           <a:prstGeom prst="rect">
             <a:avLst/>
@@ -8529,8 +8436,8 @@
         </p:nvSpPr>
         <p:spPr>
           <a:xfrm>
-            <a:off x="800000" y="4755000"/>
-            <a:ext cx="460000" cy="460000"/>
+            <a:off x="780000" y="5178480"/>
+            <a:ext cx="420000" cy="420000"/>
           </a:xfrm>
           <a:prstGeom prst="ellipse">
             <a:avLst/>
@@ -8563,7 +8470,7 @@
           <a:p>
             <a:pPr algn="ctr"/>
             <a:r>
-              <a:rPr sz="1600" b="1">
+              <a:rPr sz="1400" b="1">
                 <a:solidFill>
                   <a:srgbClr val="FFFFFF"/>
                 </a:solidFill>
@@ -8582,8 +8489,8 @@
         </p:nvSpPr>
         <p:spPr>
           <a:xfrm>
-            <a:off x="1450000" y="4360000"/>
-            <a:ext cx="10050000" cy="1250000"/>
+            <a:off x="1380000" y="4676740"/>
+            <a:ext cx="10150000" cy="1423480"/>
           </a:xfrm>
           <a:prstGeom prst="rect">
             <a:avLst/>
@@ -8591,20 +8498,35 @@
           <a:noFill/>
         </p:spPr>
         <p:txBody>
-          <a:bodyPr wrap="square" anchor="ctr" lIns="50800" rIns="50800">
+          <a:bodyPr wrap="square" anchor="ctr">
             <a:spAutoFit/>
           </a:bodyPr>
           <a:lstStyle/>
           <a:p>
-            <a:pPr algn="l"/>
             <a:r>
-              <a:rPr sz="1600" b="0">
+              <a:rPr sz="1500" b="1">
                 <a:solidFill>
-                  <a:srgbClr val="1B2430"/>
+                  <a:srgbClr val="1F3A5F"/>
                 </a:solidFill>
                 <a:latin typeface="Calibri"/>
               </a:rPr>
-              <a:t>RISC-V ning cheklovlari ham bor: ekotizim (kompilyator optimizatsiyalari, operatsion tizim, kutubxonalar) ARM va x86 dan yosh; yuqori unumdorli server yadrolari hali kam; standartlashtirilmagan kengaytmalar fragmentatsiyaga olib kelishi mumkin. Shunga…</a:t>
+              <a:t>RISC-V ning cheklovlari ham bor: ekotizim (kompilyator optimizatsiyalari, operatsion tizim, kutubxonalar) ARM va x86 dan yosh; yuqori unumdorli server yadrolari hali kam; standartlashtirilmagan kengaytmalar fragmentatsiyaga olib kelishi mumkin.</a:t>
+            </a:r>
+          </a:p>
+          <a:p>
+            <a:pPr>
+              <a:spcBef>
+                <a:spcPts val="400"/>
+              </a:spcBef>
+            </a:pPr>
+            <a:r>
+              <a:rPr sz="1400">
+                <a:solidFill>
+                  <a:srgbClr val="334055"/>
+                </a:solidFill>
+                <a:latin typeface="Calibri"/>
+              </a:rPr>
+              <a:t>Shunga qaramay, SI tezlatkichlari sohasida RISC-V de-fakto standart boshqaruv va vektor yadrosi bo'lib bormoqda.</a:t>
             </a:r>
           </a:p>
         </p:txBody>
@@ -10928,7 +10850,7 @@
                 </a:solidFill>
                 <a:latin typeface="Calibri"/>
               </a:rPr>
-              <a:t>Sun'iy intellekt chiplarini loyihalashning asosiy tamoyillari (1)</a:t>
+              <a:t>Sun'iy intellekt chiplarini loyihalashning asosiy tamoyillari</a:t>
             </a:r>
           </a:p>
         </p:txBody>
@@ -11055,8 +10977,8 @@
         </p:nvSpPr>
         <p:spPr>
           <a:xfrm>
-            <a:off x="550000" y="1300000"/>
-            <a:ext cx="11100000" cy="894000"/>
+            <a:off x="550000" y="3515000"/>
+            <a:ext cx="11100000" cy="520000"/>
           </a:xfrm>
           <a:prstGeom prst="roundRect">
             <a:avLst>
@@ -11101,8 +11023,8 @@
         </p:nvSpPr>
         <p:spPr>
           <a:xfrm>
-            <a:off x="550000" y="1300000"/>
-            <a:ext cx="70000" cy="894000"/>
+            <a:off x="550000" y="3515000"/>
+            <a:ext cx="70000" cy="520000"/>
           </a:xfrm>
           <a:prstGeom prst="rect">
             <a:avLst/>
@@ -11145,8 +11067,8 @@
         </p:nvSpPr>
         <p:spPr>
           <a:xfrm>
-            <a:off x="800000" y="1517000"/>
-            <a:ext cx="460000" cy="460000"/>
+            <a:off x="780000" y="3585000"/>
+            <a:ext cx="380000" cy="380000"/>
           </a:xfrm>
           <a:prstGeom prst="ellipse">
             <a:avLst/>
@@ -11179,7 +11101,7 @@
           <a:p>
             <a:pPr algn="ctr"/>
             <a:r>
-              <a:rPr sz="1600" b="1">
+              <a:rPr sz="1400" b="1">
                 <a:solidFill>
                   <a:srgbClr val="FFFFFF"/>
                 </a:solidFill>
@@ -11198,8 +11120,8 @@
         </p:nvSpPr>
         <p:spPr>
           <a:xfrm>
-            <a:off x="1450000" y="1300000"/>
-            <a:ext cx="10050000" cy="894000"/>
+            <a:off x="1380000" y="3555000"/>
+            <a:ext cx="10150000" cy="440000"/>
           </a:xfrm>
           <a:prstGeom prst="rect">
             <a:avLst/>
@@ -11207,12 +11129,11 @@
           <a:noFill/>
         </p:spPr>
         <p:txBody>
-          <a:bodyPr wrap="square" anchor="ctr" lIns="50800" rIns="50800">
+          <a:bodyPr wrap="square" anchor="ctr">
             <a:spAutoFit/>
           </a:bodyPr>
           <a:lstStyle/>
           <a:p>
-            <a:pPr algn="l"/>
             <a:r>
               <a:rPr sz="1600" b="0">
                 <a:solidFill>
@@ -11221,718 +11142,6 @@
                 <a:latin typeface="Calibri"/>
               </a:rPr>
               <a:t>Sze va hammualliflar [4] hamda Hennessy va Patterson [1] asosida SI chipi loyihalashning oltita tamoyilini ajratish mumkin.</a:t>
-            </a:r>
-          </a:p>
-        </p:txBody>
-      </p:sp>
-      <p:sp>
-        <p:nvSpPr>
-          <p:cNvPr id="14" name="Rounded Rectangle 13"/>
-          <p:cNvSpPr/>
-          <p:nvPr/>
-        </p:nvSpPr>
-        <p:spPr>
-          <a:xfrm>
-            <a:off x="550000" y="2314000"/>
-            <a:ext cx="11100000" cy="894000"/>
-          </a:xfrm>
-          <a:prstGeom prst="roundRect">
-            <a:avLst>
-              <a:gd name="adj" fmla="val 18000"/>
-            </a:avLst>
-          </a:prstGeom>
-          <a:solidFill>
-            <a:srgbClr val="F5F8FC"/>
-          </a:solidFill>
-          <a:ln>
-            <a:noFill/>
-          </a:ln>
-          <a:effectLst/>
-        </p:spPr>
-        <p:style>
-          <a:lnRef idx="1">
-            <a:schemeClr val="accent1"/>
-          </a:lnRef>
-          <a:fillRef idx="3">
-            <a:schemeClr val="accent1"/>
-          </a:fillRef>
-          <a:effectRef idx="2">
-            <a:schemeClr val="accent1"/>
-          </a:effectRef>
-          <a:fontRef idx="minor">
-            <a:schemeClr val="lt1"/>
-          </a:fontRef>
-        </p:style>
-        <p:txBody>
-          <a:bodyPr rtlCol="0" anchor="ctr"/>
-          <a:lstStyle/>
-          <a:p>
-            <a:pPr algn="ctr"/>
-          </a:p>
-        </p:txBody>
-      </p:sp>
-      <p:sp>
-        <p:nvSpPr>
-          <p:cNvPr id="15" name="Rectangle 14"/>
-          <p:cNvSpPr/>
-          <p:nvPr/>
-        </p:nvSpPr>
-        <p:spPr>
-          <a:xfrm>
-            <a:off x="550000" y="2314000"/>
-            <a:ext cx="70000" cy="894000"/>
-          </a:xfrm>
-          <a:prstGeom prst="rect">
-            <a:avLst/>
-          </a:prstGeom>
-          <a:solidFill>
-            <a:srgbClr val="0F8B8D"/>
-          </a:solidFill>
-          <a:ln>
-            <a:noFill/>
-          </a:ln>
-          <a:effectLst/>
-        </p:spPr>
-        <p:style>
-          <a:lnRef idx="1">
-            <a:schemeClr val="accent1"/>
-          </a:lnRef>
-          <a:fillRef idx="3">
-            <a:schemeClr val="accent1"/>
-          </a:fillRef>
-          <a:effectRef idx="2">
-            <a:schemeClr val="accent1"/>
-          </a:effectRef>
-          <a:fontRef idx="minor">
-            <a:schemeClr val="lt1"/>
-          </a:fontRef>
-        </p:style>
-        <p:txBody>
-          <a:bodyPr rtlCol="0" anchor="ctr"/>
-          <a:lstStyle/>
-          <a:p>
-            <a:pPr algn="ctr"/>
-          </a:p>
-        </p:txBody>
-      </p:sp>
-      <p:sp>
-        <p:nvSpPr>
-          <p:cNvPr id="16" name="Oval 15"/>
-          <p:cNvSpPr/>
-          <p:nvPr/>
-        </p:nvSpPr>
-        <p:spPr>
-          <a:xfrm>
-            <a:off x="800000" y="2531000"/>
-            <a:ext cx="460000" cy="460000"/>
-          </a:xfrm>
-          <a:prstGeom prst="ellipse">
-            <a:avLst/>
-          </a:prstGeom>
-          <a:solidFill>
-            <a:srgbClr val="0F8B8D"/>
-          </a:solidFill>
-          <a:ln>
-            <a:noFill/>
-          </a:ln>
-          <a:effectLst/>
-        </p:spPr>
-        <p:style>
-          <a:lnRef idx="1">
-            <a:schemeClr val="accent1"/>
-          </a:lnRef>
-          <a:fillRef idx="3">
-            <a:schemeClr val="accent1"/>
-          </a:fillRef>
-          <a:effectRef idx="2">
-            <a:schemeClr val="accent1"/>
-          </a:effectRef>
-          <a:fontRef idx="minor">
-            <a:schemeClr val="lt1"/>
-          </a:fontRef>
-        </p:style>
-        <p:txBody>
-          <a:bodyPr rtlCol="0" anchor="ctr" lIns="0" rIns="0"/>
-          <a:lstStyle/>
-          <a:p>
-            <a:pPr algn="ctr"/>
-            <a:r>
-              <a:rPr sz="1600" b="1">
-                <a:solidFill>
-                  <a:srgbClr val="FFFFFF"/>
-                </a:solidFill>
-                <a:latin typeface="Calibri"/>
-              </a:rPr>
-              <a:t>2</a:t>
-            </a:r>
-          </a:p>
-        </p:txBody>
-      </p:sp>
-      <p:sp>
-        <p:nvSpPr>
-          <p:cNvPr id="17" name="TextBox 16"/>
-          <p:cNvSpPr txBox="1"/>
-          <p:nvPr/>
-        </p:nvSpPr>
-        <p:spPr>
-          <a:xfrm>
-            <a:off x="1450000" y="2314000"/>
-            <a:ext cx="10050000" cy="894000"/>
-          </a:xfrm>
-          <a:prstGeom prst="rect">
-            <a:avLst/>
-          </a:prstGeom>
-          <a:noFill/>
-        </p:spPr>
-        <p:txBody>
-          <a:bodyPr wrap="square" anchor="ctr" lIns="50800" rIns="50800">
-            <a:spAutoFit/>
-          </a:bodyPr>
-          <a:lstStyle/>
-          <a:p>
-            <a:pPr algn="l"/>
-            <a:r>
-              <a:rPr sz="1600" b="0">
-                <a:solidFill>
-                  <a:srgbClr val="1B2430"/>
-                </a:solidFill>
-                <a:latin typeface="Calibri"/>
-              </a:rPr>
-              <a:t>1. Ma'lumot oqimi (dataflow) ni tanlash. PE massivida qaysi ma'lumot joyida turadi va qaysi biri harakatlanadi — loyihaning markaziy qarori.</a:t>
-            </a:r>
-          </a:p>
-        </p:txBody>
-      </p:sp>
-      <p:sp>
-        <p:nvSpPr>
-          <p:cNvPr id="18" name="Rounded Rectangle 17"/>
-          <p:cNvSpPr/>
-          <p:nvPr/>
-        </p:nvSpPr>
-        <p:spPr>
-          <a:xfrm>
-            <a:off x="550000" y="3328000"/>
-            <a:ext cx="11100000" cy="894000"/>
-          </a:xfrm>
-          <a:prstGeom prst="roundRect">
-            <a:avLst>
-              <a:gd name="adj" fmla="val 18000"/>
-            </a:avLst>
-          </a:prstGeom>
-          <a:solidFill>
-            <a:srgbClr val="F5F8FC"/>
-          </a:solidFill>
-          <a:ln>
-            <a:noFill/>
-          </a:ln>
-          <a:effectLst/>
-        </p:spPr>
-        <p:style>
-          <a:lnRef idx="1">
-            <a:schemeClr val="accent1"/>
-          </a:lnRef>
-          <a:fillRef idx="3">
-            <a:schemeClr val="accent1"/>
-          </a:fillRef>
-          <a:effectRef idx="2">
-            <a:schemeClr val="accent1"/>
-          </a:effectRef>
-          <a:fontRef idx="minor">
-            <a:schemeClr val="lt1"/>
-          </a:fontRef>
-        </p:style>
-        <p:txBody>
-          <a:bodyPr rtlCol="0" anchor="ctr"/>
-          <a:lstStyle/>
-          <a:p>
-            <a:pPr algn="ctr"/>
-          </a:p>
-        </p:txBody>
-      </p:sp>
-      <p:sp>
-        <p:nvSpPr>
-          <p:cNvPr id="19" name="Rectangle 18"/>
-          <p:cNvSpPr/>
-          <p:nvPr/>
-        </p:nvSpPr>
-        <p:spPr>
-          <a:xfrm>
-            <a:off x="550000" y="3328000"/>
-            <a:ext cx="70000" cy="894000"/>
-          </a:xfrm>
-          <a:prstGeom prst="rect">
-            <a:avLst/>
-          </a:prstGeom>
-          <a:solidFill>
-            <a:srgbClr val="6A3FB5"/>
-          </a:solidFill>
-          <a:ln>
-            <a:noFill/>
-          </a:ln>
-          <a:effectLst/>
-        </p:spPr>
-        <p:style>
-          <a:lnRef idx="1">
-            <a:schemeClr val="accent1"/>
-          </a:lnRef>
-          <a:fillRef idx="3">
-            <a:schemeClr val="accent1"/>
-          </a:fillRef>
-          <a:effectRef idx="2">
-            <a:schemeClr val="accent1"/>
-          </a:effectRef>
-          <a:fontRef idx="minor">
-            <a:schemeClr val="lt1"/>
-          </a:fontRef>
-        </p:style>
-        <p:txBody>
-          <a:bodyPr rtlCol="0" anchor="ctr"/>
-          <a:lstStyle/>
-          <a:p>
-            <a:pPr algn="ctr"/>
-          </a:p>
-        </p:txBody>
-      </p:sp>
-      <p:sp>
-        <p:nvSpPr>
-          <p:cNvPr id="20" name="Oval 19"/>
-          <p:cNvSpPr/>
-          <p:nvPr/>
-        </p:nvSpPr>
-        <p:spPr>
-          <a:xfrm>
-            <a:off x="800000" y="3545000"/>
-            <a:ext cx="460000" cy="460000"/>
-          </a:xfrm>
-          <a:prstGeom prst="ellipse">
-            <a:avLst/>
-          </a:prstGeom>
-          <a:solidFill>
-            <a:srgbClr val="6A3FB5"/>
-          </a:solidFill>
-          <a:ln>
-            <a:noFill/>
-          </a:ln>
-          <a:effectLst/>
-        </p:spPr>
-        <p:style>
-          <a:lnRef idx="1">
-            <a:schemeClr val="accent1"/>
-          </a:lnRef>
-          <a:fillRef idx="3">
-            <a:schemeClr val="accent1"/>
-          </a:fillRef>
-          <a:effectRef idx="2">
-            <a:schemeClr val="accent1"/>
-          </a:effectRef>
-          <a:fontRef idx="minor">
-            <a:schemeClr val="lt1"/>
-          </a:fontRef>
-        </p:style>
-        <p:txBody>
-          <a:bodyPr rtlCol="0" anchor="ctr" lIns="0" rIns="0"/>
-          <a:lstStyle/>
-          <a:p>
-            <a:pPr algn="ctr"/>
-            <a:r>
-              <a:rPr sz="1600" b="1">
-                <a:solidFill>
-                  <a:srgbClr val="FFFFFF"/>
-                </a:solidFill>
-                <a:latin typeface="Calibri"/>
-              </a:rPr>
-              <a:t>3</a:t>
-            </a:r>
-          </a:p>
-        </p:txBody>
-      </p:sp>
-      <p:sp>
-        <p:nvSpPr>
-          <p:cNvPr id="21" name="TextBox 20"/>
-          <p:cNvSpPr txBox="1"/>
-          <p:nvPr/>
-        </p:nvSpPr>
-        <p:spPr>
-          <a:xfrm>
-            <a:off x="1450000" y="3328000"/>
-            <a:ext cx="10050000" cy="894000"/>
-          </a:xfrm>
-          <a:prstGeom prst="rect">
-            <a:avLst/>
-          </a:prstGeom>
-          <a:noFill/>
-        </p:spPr>
-        <p:txBody>
-          <a:bodyPr wrap="square" anchor="ctr" lIns="50800" rIns="50800">
-            <a:spAutoFit/>
-          </a:bodyPr>
-          <a:lstStyle/>
-          <a:p>
-            <a:pPr algn="l"/>
-            <a:r>
-              <a:rPr sz="1600" b="0">
-                <a:solidFill>
-                  <a:srgbClr val="1B2430"/>
-                </a:solidFill>
-                <a:latin typeface="Calibri"/>
-              </a:rPr>
-              <a:t>2. Xotira iyerarxiyasi va energiya byudjeti.</a:t>
-            </a:r>
-          </a:p>
-        </p:txBody>
-      </p:sp>
-      <p:sp>
-        <p:nvSpPr>
-          <p:cNvPr id="22" name="Rounded Rectangle 21"/>
-          <p:cNvSpPr/>
-          <p:nvPr/>
-        </p:nvSpPr>
-        <p:spPr>
-          <a:xfrm>
-            <a:off x="550000" y="4342000"/>
-            <a:ext cx="11100000" cy="894000"/>
-          </a:xfrm>
-          <a:prstGeom prst="roundRect">
-            <a:avLst>
-              <a:gd name="adj" fmla="val 18000"/>
-            </a:avLst>
-          </a:prstGeom>
-          <a:solidFill>
-            <a:srgbClr val="F5F8FC"/>
-          </a:solidFill>
-          <a:ln>
-            <a:noFill/>
-          </a:ln>
-          <a:effectLst/>
-        </p:spPr>
-        <p:style>
-          <a:lnRef idx="1">
-            <a:schemeClr val="accent1"/>
-          </a:lnRef>
-          <a:fillRef idx="3">
-            <a:schemeClr val="accent1"/>
-          </a:fillRef>
-          <a:effectRef idx="2">
-            <a:schemeClr val="accent1"/>
-          </a:effectRef>
-          <a:fontRef idx="minor">
-            <a:schemeClr val="lt1"/>
-          </a:fontRef>
-        </p:style>
-        <p:txBody>
-          <a:bodyPr rtlCol="0" anchor="ctr"/>
-          <a:lstStyle/>
-          <a:p>
-            <a:pPr algn="ctr"/>
-          </a:p>
-        </p:txBody>
-      </p:sp>
-      <p:sp>
-        <p:nvSpPr>
-          <p:cNvPr id="23" name="Rectangle 22"/>
-          <p:cNvSpPr/>
-          <p:nvPr/>
-        </p:nvSpPr>
-        <p:spPr>
-          <a:xfrm>
-            <a:off x="550000" y="4342000"/>
-            <a:ext cx="70000" cy="894000"/>
-          </a:xfrm>
-          <a:prstGeom prst="rect">
-            <a:avLst/>
-          </a:prstGeom>
-          <a:solidFill>
-            <a:srgbClr val="B7791F"/>
-          </a:solidFill>
-          <a:ln>
-            <a:noFill/>
-          </a:ln>
-          <a:effectLst/>
-        </p:spPr>
-        <p:style>
-          <a:lnRef idx="1">
-            <a:schemeClr val="accent1"/>
-          </a:lnRef>
-          <a:fillRef idx="3">
-            <a:schemeClr val="accent1"/>
-          </a:fillRef>
-          <a:effectRef idx="2">
-            <a:schemeClr val="accent1"/>
-          </a:effectRef>
-          <a:fontRef idx="minor">
-            <a:schemeClr val="lt1"/>
-          </a:fontRef>
-        </p:style>
-        <p:txBody>
-          <a:bodyPr rtlCol="0" anchor="ctr"/>
-          <a:lstStyle/>
-          <a:p>
-            <a:pPr algn="ctr"/>
-          </a:p>
-        </p:txBody>
-      </p:sp>
-      <p:sp>
-        <p:nvSpPr>
-          <p:cNvPr id="24" name="Oval 23"/>
-          <p:cNvSpPr/>
-          <p:nvPr/>
-        </p:nvSpPr>
-        <p:spPr>
-          <a:xfrm>
-            <a:off x="800000" y="4559000"/>
-            <a:ext cx="460000" cy="460000"/>
-          </a:xfrm>
-          <a:prstGeom prst="ellipse">
-            <a:avLst/>
-          </a:prstGeom>
-          <a:solidFill>
-            <a:srgbClr val="B7791F"/>
-          </a:solidFill>
-          <a:ln>
-            <a:noFill/>
-          </a:ln>
-          <a:effectLst/>
-        </p:spPr>
-        <p:style>
-          <a:lnRef idx="1">
-            <a:schemeClr val="accent1"/>
-          </a:lnRef>
-          <a:fillRef idx="3">
-            <a:schemeClr val="accent1"/>
-          </a:fillRef>
-          <a:effectRef idx="2">
-            <a:schemeClr val="accent1"/>
-          </a:effectRef>
-          <a:fontRef idx="minor">
-            <a:schemeClr val="lt1"/>
-          </a:fontRef>
-        </p:style>
-        <p:txBody>
-          <a:bodyPr rtlCol="0" anchor="ctr" lIns="0" rIns="0"/>
-          <a:lstStyle/>
-          <a:p>
-            <a:pPr algn="ctr"/>
-            <a:r>
-              <a:rPr sz="1600" b="1">
-                <a:solidFill>
-                  <a:srgbClr val="FFFFFF"/>
-                </a:solidFill>
-                <a:latin typeface="Calibri"/>
-              </a:rPr>
-              <a:t>4</a:t>
-            </a:r>
-          </a:p>
-        </p:txBody>
-      </p:sp>
-      <p:sp>
-        <p:nvSpPr>
-          <p:cNvPr id="25" name="TextBox 24"/>
-          <p:cNvSpPr txBox="1"/>
-          <p:nvPr/>
-        </p:nvSpPr>
-        <p:spPr>
-          <a:xfrm>
-            <a:off x="1450000" y="4342000"/>
-            <a:ext cx="10050000" cy="894000"/>
-          </a:xfrm>
-          <a:prstGeom prst="rect">
-            <a:avLst/>
-          </a:prstGeom>
-          <a:noFill/>
-        </p:spPr>
-        <p:txBody>
-          <a:bodyPr wrap="square" anchor="ctr" lIns="50800" rIns="50800">
-            <a:spAutoFit/>
-          </a:bodyPr>
-          <a:lstStyle/>
-          <a:p>
-            <a:pPr algn="l"/>
-            <a:r>
-              <a:rPr sz="1600" b="0">
-                <a:solidFill>
-                  <a:srgbClr val="1B2430"/>
-                </a:solidFill>
-                <a:latin typeface="Calibri"/>
-              </a:rPr>
-              <a:t>3. Aniqlikni kamaytirish. Har ikki baravar kam bit — ko'paytirgich maydoni taxminan 4 baravar kichik (ko'paytirgich murakkabligi bit kengligi kvadratiga proporsional), xotira va…</a:t>
-            </a:r>
-          </a:p>
-        </p:txBody>
-      </p:sp>
-      <p:sp>
-        <p:nvSpPr>
-          <p:cNvPr id="26" name="Rounded Rectangle 25"/>
-          <p:cNvSpPr/>
-          <p:nvPr/>
-        </p:nvSpPr>
-        <p:spPr>
-          <a:xfrm>
-            <a:off x="550000" y="5356000"/>
-            <a:ext cx="11100000" cy="894000"/>
-          </a:xfrm>
-          <a:prstGeom prst="roundRect">
-            <a:avLst>
-              <a:gd name="adj" fmla="val 18000"/>
-            </a:avLst>
-          </a:prstGeom>
-          <a:solidFill>
-            <a:srgbClr val="F5F8FC"/>
-          </a:solidFill>
-          <a:ln>
-            <a:noFill/>
-          </a:ln>
-          <a:effectLst/>
-        </p:spPr>
-        <p:style>
-          <a:lnRef idx="1">
-            <a:schemeClr val="accent1"/>
-          </a:lnRef>
-          <a:fillRef idx="3">
-            <a:schemeClr val="accent1"/>
-          </a:fillRef>
-          <a:effectRef idx="2">
-            <a:schemeClr val="accent1"/>
-          </a:effectRef>
-          <a:fontRef idx="minor">
-            <a:schemeClr val="lt1"/>
-          </a:fontRef>
-        </p:style>
-        <p:txBody>
-          <a:bodyPr rtlCol="0" anchor="ctr"/>
-          <a:lstStyle/>
-          <a:p>
-            <a:pPr algn="ctr"/>
-          </a:p>
-        </p:txBody>
-      </p:sp>
-      <p:sp>
-        <p:nvSpPr>
-          <p:cNvPr id="27" name="Rectangle 26"/>
-          <p:cNvSpPr/>
-          <p:nvPr/>
-        </p:nvSpPr>
-        <p:spPr>
-          <a:xfrm>
-            <a:off x="550000" y="5356000"/>
-            <a:ext cx="70000" cy="894000"/>
-          </a:xfrm>
-          <a:prstGeom prst="rect">
-            <a:avLst/>
-          </a:prstGeom>
-          <a:solidFill>
-            <a:srgbClr val="C0392B"/>
-          </a:solidFill>
-          <a:ln>
-            <a:noFill/>
-          </a:ln>
-          <a:effectLst/>
-        </p:spPr>
-        <p:style>
-          <a:lnRef idx="1">
-            <a:schemeClr val="accent1"/>
-          </a:lnRef>
-          <a:fillRef idx="3">
-            <a:schemeClr val="accent1"/>
-          </a:fillRef>
-          <a:effectRef idx="2">
-            <a:schemeClr val="accent1"/>
-          </a:effectRef>
-          <a:fontRef idx="minor">
-            <a:schemeClr val="lt1"/>
-          </a:fontRef>
-        </p:style>
-        <p:txBody>
-          <a:bodyPr rtlCol="0" anchor="ctr"/>
-          <a:lstStyle/>
-          <a:p>
-            <a:pPr algn="ctr"/>
-          </a:p>
-        </p:txBody>
-      </p:sp>
-      <p:sp>
-        <p:nvSpPr>
-          <p:cNvPr id="28" name="Oval 27"/>
-          <p:cNvSpPr/>
-          <p:nvPr/>
-        </p:nvSpPr>
-        <p:spPr>
-          <a:xfrm>
-            <a:off x="800000" y="5573000"/>
-            <a:ext cx="460000" cy="460000"/>
-          </a:xfrm>
-          <a:prstGeom prst="ellipse">
-            <a:avLst/>
-          </a:prstGeom>
-          <a:solidFill>
-            <a:srgbClr val="C0392B"/>
-          </a:solidFill>
-          <a:ln>
-            <a:noFill/>
-          </a:ln>
-          <a:effectLst/>
-        </p:spPr>
-        <p:style>
-          <a:lnRef idx="1">
-            <a:schemeClr val="accent1"/>
-          </a:lnRef>
-          <a:fillRef idx="3">
-            <a:schemeClr val="accent1"/>
-          </a:fillRef>
-          <a:effectRef idx="2">
-            <a:schemeClr val="accent1"/>
-          </a:effectRef>
-          <a:fontRef idx="minor">
-            <a:schemeClr val="lt1"/>
-          </a:fontRef>
-        </p:style>
-        <p:txBody>
-          <a:bodyPr rtlCol="0" anchor="ctr" lIns="0" rIns="0"/>
-          <a:lstStyle/>
-          <a:p>
-            <a:pPr algn="ctr"/>
-            <a:r>
-              <a:rPr sz="1600" b="1">
-                <a:solidFill>
-                  <a:srgbClr val="FFFFFF"/>
-                </a:solidFill>
-                <a:latin typeface="Calibri"/>
-              </a:rPr>
-              <a:t>5</a:t>
-            </a:r>
-          </a:p>
-        </p:txBody>
-      </p:sp>
-      <p:sp>
-        <p:nvSpPr>
-          <p:cNvPr id="29" name="TextBox 28"/>
-          <p:cNvSpPr txBox="1"/>
-          <p:nvPr/>
-        </p:nvSpPr>
-        <p:spPr>
-          <a:xfrm>
-            <a:off x="1450000" y="5356000"/>
-            <a:ext cx="10050000" cy="894000"/>
-          </a:xfrm>
-          <a:prstGeom prst="rect">
-            <a:avLst/>
-          </a:prstGeom>
-          <a:noFill/>
-        </p:spPr>
-        <p:txBody>
-          <a:bodyPr wrap="square" anchor="ctr" lIns="50800" rIns="50800">
-            <a:spAutoFit/>
-          </a:bodyPr>
-          <a:lstStyle/>
-          <a:p>
-            <a:pPr algn="l"/>
-            <a:r>
-              <a:rPr sz="1600" b="0">
-                <a:solidFill>
-                  <a:srgbClr val="1B2430"/>
-                </a:solidFill>
-                <a:latin typeface="Calibri"/>
-              </a:rPr>
-              <a:t>4. Siyraklik. Neyron tarmoqda nollar ko'p (ReLU dan keyin aktivatsiyalar, kesilgan og'irliklar).</a:t>
             </a:r>
           </a:p>
         </p:txBody>
@@ -11954,7 +11163,7 @@
               <p:cTn id="2" dur="indefinite" nodeType="mainSeq">
                 <p:childTnLst>
                   <p:par>
-                    <p:cTn id="127" fill="hold">
+                    <p:cTn id="31" fill="hold">
                       <p:stCondLst>
                         <p:cond delay="indefinite"/>
                         <p:cond evt="onBegin" delay="0">
@@ -12342,1446 +11551,6 @@
                                         <p:cTn id="30" dur="550" fill="hold"/>
                                         <p:tgtEl>
                                           <p:spTgt spid="13"/>
-                                        </p:tgtEl>
-                                        <p:attrNameLst>
-                                          <p:attrName>ppt_y</p:attrName>
-                                        </p:attrNameLst>
-                                      </p:cBhvr>
-                                      <p:tavLst>
-                                        <p:tav tm="0">
-                                          <p:val>
-                                            <p:strVal val="#ppt_y+.08"/>
-                                          </p:val>
-                                        </p:tav>
-                                        <p:tav tm="100000">
-                                          <p:val>
-                                            <p:strVal val="#ppt_y"/>
-                                          </p:val>
-                                        </p:tav>
-                                      </p:tavLst>
-                                    </p:anim>
-                                  </p:childTnLst>
-                                </p:cTn>
-                              </p:par>
-                            </p:childTnLst>
-                          </p:cTn>
-                        </p:par>
-                        <p:par>
-                          <p:cTn id="31" fill="hold">
-                            <p:stCondLst>
-                              <p:cond delay="440"/>
-                            </p:stCondLst>
-                            <p:childTnLst>
-                              <p:par>
-                                <p:cTn id="32" presetID="42" presetClass="entr" presetSubtype="0" fill="hold" grpId="0" nodeType="afterEffect">
-                                  <p:stCondLst>
-                                    <p:cond delay="0"/>
-                                  </p:stCondLst>
-                                  <p:childTnLst>
-                                    <p:set>
-                                      <p:cBhvr>
-                                        <p:cTn id="33" dur="1" fill="hold">
-                                          <p:stCondLst>
-                                            <p:cond delay="0"/>
-                                          </p:stCondLst>
-                                        </p:cTn>
-                                        <p:tgtEl>
-                                          <p:spTgt spid="14"/>
-                                        </p:tgtEl>
-                                        <p:attrNameLst>
-                                          <p:attrName>style.visibility</p:attrName>
-                                        </p:attrNameLst>
-                                      </p:cBhvr>
-                                      <p:to>
-                                        <p:strVal val="visible"/>
-                                      </p:to>
-                                    </p:set>
-                                    <p:animEffect transition="in" filter="fade">
-                                      <p:cBhvr>
-                                        <p:cTn id="34" dur="550"/>
-                                        <p:tgtEl>
-                                          <p:spTgt spid="14"/>
-                                        </p:tgtEl>
-                                      </p:cBhvr>
-                                    </p:animEffect>
-                                    <p:anim calcmode="lin" valueType="num">
-                                      <p:cBhvr additive="base">
-                                        <p:cTn id="35" dur="550" fill="hold"/>
-                                        <p:tgtEl>
-                                          <p:spTgt spid="14"/>
-                                        </p:tgtEl>
-                                        <p:attrNameLst>
-                                          <p:attrName>ppt_x</p:attrName>
-                                        </p:attrNameLst>
-                                      </p:cBhvr>
-                                      <p:tavLst>
-                                        <p:tav tm="0">
-                                          <p:val>
-                                            <p:strVal val="#ppt_x"/>
-                                          </p:val>
-                                        </p:tav>
-                                        <p:tav tm="100000">
-                                          <p:val>
-                                            <p:strVal val="#ppt_x"/>
-                                          </p:val>
-                                        </p:tav>
-                                      </p:tavLst>
-                                    </p:anim>
-                                    <p:anim calcmode="lin" valueType="num">
-                                      <p:cBhvr additive="base">
-                                        <p:cTn id="36" dur="550" fill="hold"/>
-                                        <p:tgtEl>
-                                          <p:spTgt spid="14"/>
-                                        </p:tgtEl>
-                                        <p:attrNameLst>
-                                          <p:attrName>ppt_y</p:attrName>
-                                        </p:attrNameLst>
-                                      </p:cBhvr>
-                                      <p:tavLst>
-                                        <p:tav tm="0">
-                                          <p:val>
-                                            <p:strVal val="#ppt_y+.08"/>
-                                          </p:val>
-                                        </p:tav>
-                                        <p:tav tm="100000">
-                                          <p:val>
-                                            <p:strVal val="#ppt_y"/>
-                                          </p:val>
-                                        </p:tav>
-                                      </p:tavLst>
-                                    </p:anim>
-                                  </p:childTnLst>
-                                </p:cTn>
-                              </p:par>
-                            </p:childTnLst>
-                          </p:cTn>
-                        </p:par>
-                        <p:par>
-                          <p:cTn id="37" fill="hold">
-                            <p:stCondLst>
-                              <p:cond delay="440"/>
-                            </p:stCondLst>
-                            <p:childTnLst>
-                              <p:par>
-                                <p:cTn id="38" presetID="42" presetClass="entr" presetSubtype="0" fill="hold" grpId="0" nodeType="afterEffect">
-                                  <p:stCondLst>
-                                    <p:cond delay="0"/>
-                                  </p:stCondLst>
-                                  <p:childTnLst>
-                                    <p:set>
-                                      <p:cBhvr>
-                                        <p:cTn id="39" dur="1" fill="hold">
-                                          <p:stCondLst>
-                                            <p:cond delay="0"/>
-                                          </p:stCondLst>
-                                        </p:cTn>
-                                        <p:tgtEl>
-                                          <p:spTgt spid="15"/>
-                                        </p:tgtEl>
-                                        <p:attrNameLst>
-                                          <p:attrName>style.visibility</p:attrName>
-                                        </p:attrNameLst>
-                                      </p:cBhvr>
-                                      <p:to>
-                                        <p:strVal val="visible"/>
-                                      </p:to>
-                                    </p:set>
-                                    <p:animEffect transition="in" filter="fade">
-                                      <p:cBhvr>
-                                        <p:cTn id="40" dur="550"/>
-                                        <p:tgtEl>
-                                          <p:spTgt spid="15"/>
-                                        </p:tgtEl>
-                                      </p:cBhvr>
-                                    </p:animEffect>
-                                    <p:anim calcmode="lin" valueType="num">
-                                      <p:cBhvr additive="base">
-                                        <p:cTn id="41" dur="550" fill="hold"/>
-                                        <p:tgtEl>
-                                          <p:spTgt spid="15"/>
-                                        </p:tgtEl>
-                                        <p:attrNameLst>
-                                          <p:attrName>ppt_x</p:attrName>
-                                        </p:attrNameLst>
-                                      </p:cBhvr>
-                                      <p:tavLst>
-                                        <p:tav tm="0">
-                                          <p:val>
-                                            <p:strVal val="#ppt_x"/>
-                                          </p:val>
-                                        </p:tav>
-                                        <p:tav tm="100000">
-                                          <p:val>
-                                            <p:strVal val="#ppt_x"/>
-                                          </p:val>
-                                        </p:tav>
-                                      </p:tavLst>
-                                    </p:anim>
-                                    <p:anim calcmode="lin" valueType="num">
-                                      <p:cBhvr additive="base">
-                                        <p:cTn id="42" dur="550" fill="hold"/>
-                                        <p:tgtEl>
-                                          <p:spTgt spid="15"/>
-                                        </p:tgtEl>
-                                        <p:attrNameLst>
-                                          <p:attrName>ppt_y</p:attrName>
-                                        </p:attrNameLst>
-                                      </p:cBhvr>
-                                      <p:tavLst>
-                                        <p:tav tm="0">
-                                          <p:val>
-                                            <p:strVal val="#ppt_y+.08"/>
-                                          </p:val>
-                                        </p:tav>
-                                        <p:tav tm="100000">
-                                          <p:val>
-                                            <p:strVal val="#ppt_y"/>
-                                          </p:val>
-                                        </p:tav>
-                                      </p:tavLst>
-                                    </p:anim>
-                                  </p:childTnLst>
-                                </p:cTn>
-                              </p:par>
-                            </p:childTnLst>
-                          </p:cTn>
-                        </p:par>
-                        <p:par>
-                          <p:cTn id="43" fill="hold">
-                            <p:stCondLst>
-                              <p:cond delay="440"/>
-                            </p:stCondLst>
-                            <p:childTnLst>
-                              <p:par>
-                                <p:cTn id="44" presetID="53" presetClass="entr" presetSubtype="16" fill="hold" grpId="0" nodeType="afterEffect">
-                                  <p:stCondLst>
-                                    <p:cond delay="0"/>
-                                  </p:stCondLst>
-                                  <p:childTnLst>
-                                    <p:set>
-                                      <p:cBhvr>
-                                        <p:cTn id="45" dur="1" fill="hold">
-                                          <p:stCondLst>
-                                            <p:cond delay="0"/>
-                                          </p:stCondLst>
-                                        </p:cTn>
-                                        <p:tgtEl>
-                                          <p:spTgt spid="16"/>
-                                        </p:tgtEl>
-                                        <p:attrNameLst>
-                                          <p:attrName>style.visibility</p:attrName>
-                                        </p:attrNameLst>
-                                      </p:cBhvr>
-                                      <p:to>
-                                        <p:strVal val="visible"/>
-                                      </p:to>
-                                    </p:set>
-                                    <p:animEffect transition="in" filter="fade">
-                                      <p:cBhvr>
-                                        <p:cTn id="46" dur="550"/>
-                                        <p:tgtEl>
-                                          <p:spTgt spid="16"/>
-                                        </p:tgtEl>
-                                      </p:cBhvr>
-                                    </p:animEffect>
-                                    <p:anim calcmode="lin" valueType="num">
-                                      <p:cBhvr additive="base">
-                                        <p:cTn id="47" dur="550" fill="hold"/>
-                                        <p:tgtEl>
-                                          <p:spTgt spid="16"/>
-                                        </p:tgtEl>
-                                        <p:attrNameLst>
-                                          <p:attrName>ppt_w</p:attrName>
-                                        </p:attrNameLst>
-                                      </p:cBhvr>
-                                      <p:tavLst>
-                                        <p:tav tm="0">
-                                          <p:val>
-                                            <p:strVal val="0"/>
-                                          </p:val>
-                                        </p:tav>
-                                        <p:tav tm="100000">
-                                          <p:val>
-                                            <p:strVal val="#ppt_w"/>
-                                          </p:val>
-                                        </p:tav>
-                                      </p:tavLst>
-                                    </p:anim>
-                                    <p:anim calcmode="lin" valueType="num">
-                                      <p:cBhvr additive="base">
-                                        <p:cTn id="48" dur="550" fill="hold"/>
-                                        <p:tgtEl>
-                                          <p:spTgt spid="16"/>
-                                        </p:tgtEl>
-                                        <p:attrNameLst>
-                                          <p:attrName>ppt_h</p:attrName>
-                                        </p:attrNameLst>
-                                      </p:cBhvr>
-                                      <p:tavLst>
-                                        <p:tav tm="0">
-                                          <p:val>
-                                            <p:strVal val="0"/>
-                                          </p:val>
-                                        </p:tav>
-                                        <p:tav tm="100000">
-                                          <p:val>
-                                            <p:strVal val="#ppt_h"/>
-                                          </p:val>
-                                        </p:tav>
-                                      </p:tavLst>
-                                    </p:anim>
-                                  </p:childTnLst>
-                                </p:cTn>
-                              </p:par>
-                            </p:childTnLst>
-                          </p:cTn>
-                        </p:par>
-                        <p:par>
-                          <p:cTn id="49" fill="hold">
-                            <p:stCondLst>
-                              <p:cond delay="440"/>
-                            </p:stCondLst>
-                            <p:childTnLst>
-                              <p:par>
-                                <p:cTn id="50" presetID="42" presetClass="entr" presetSubtype="0" fill="hold" grpId="0" nodeType="afterEffect">
-                                  <p:stCondLst>
-                                    <p:cond delay="0"/>
-                                  </p:stCondLst>
-                                  <p:childTnLst>
-                                    <p:set>
-                                      <p:cBhvr>
-                                        <p:cTn id="51" dur="1" fill="hold">
-                                          <p:stCondLst>
-                                            <p:cond delay="0"/>
-                                          </p:stCondLst>
-                                        </p:cTn>
-                                        <p:tgtEl>
-                                          <p:spTgt spid="17"/>
-                                        </p:tgtEl>
-                                        <p:attrNameLst>
-                                          <p:attrName>style.visibility</p:attrName>
-                                        </p:attrNameLst>
-                                      </p:cBhvr>
-                                      <p:to>
-                                        <p:strVal val="visible"/>
-                                      </p:to>
-                                    </p:set>
-                                    <p:animEffect transition="in" filter="fade">
-                                      <p:cBhvr>
-                                        <p:cTn id="52" dur="550"/>
-                                        <p:tgtEl>
-                                          <p:spTgt spid="17"/>
-                                        </p:tgtEl>
-                                      </p:cBhvr>
-                                    </p:animEffect>
-                                    <p:anim calcmode="lin" valueType="num">
-                                      <p:cBhvr additive="base">
-                                        <p:cTn id="53" dur="550" fill="hold"/>
-                                        <p:tgtEl>
-                                          <p:spTgt spid="17"/>
-                                        </p:tgtEl>
-                                        <p:attrNameLst>
-                                          <p:attrName>ppt_x</p:attrName>
-                                        </p:attrNameLst>
-                                      </p:cBhvr>
-                                      <p:tavLst>
-                                        <p:tav tm="0">
-                                          <p:val>
-                                            <p:strVal val="#ppt_x"/>
-                                          </p:val>
-                                        </p:tav>
-                                        <p:tav tm="100000">
-                                          <p:val>
-                                            <p:strVal val="#ppt_x"/>
-                                          </p:val>
-                                        </p:tav>
-                                      </p:tavLst>
-                                    </p:anim>
-                                    <p:anim calcmode="lin" valueType="num">
-                                      <p:cBhvr additive="base">
-                                        <p:cTn id="54" dur="550" fill="hold"/>
-                                        <p:tgtEl>
-                                          <p:spTgt spid="17"/>
-                                        </p:tgtEl>
-                                        <p:attrNameLst>
-                                          <p:attrName>ppt_y</p:attrName>
-                                        </p:attrNameLst>
-                                      </p:cBhvr>
-                                      <p:tavLst>
-                                        <p:tav tm="0">
-                                          <p:val>
-                                            <p:strVal val="#ppt_y+.08"/>
-                                          </p:val>
-                                        </p:tav>
-                                        <p:tav tm="100000">
-                                          <p:val>
-                                            <p:strVal val="#ppt_y"/>
-                                          </p:val>
-                                        </p:tav>
-                                      </p:tavLst>
-                                    </p:anim>
-                                  </p:childTnLst>
-                                </p:cTn>
-                              </p:par>
-                            </p:childTnLst>
-                          </p:cTn>
-                        </p:par>
-                        <p:par>
-                          <p:cTn id="55" fill="hold">
-                            <p:stCondLst>
-                              <p:cond delay="660"/>
-                            </p:stCondLst>
-                            <p:childTnLst>
-                              <p:par>
-                                <p:cTn id="56" presetID="42" presetClass="entr" presetSubtype="0" fill="hold" grpId="0" nodeType="afterEffect">
-                                  <p:stCondLst>
-                                    <p:cond delay="0"/>
-                                  </p:stCondLst>
-                                  <p:childTnLst>
-                                    <p:set>
-                                      <p:cBhvr>
-                                        <p:cTn id="57" dur="1" fill="hold">
-                                          <p:stCondLst>
-                                            <p:cond delay="0"/>
-                                          </p:stCondLst>
-                                        </p:cTn>
-                                        <p:tgtEl>
-                                          <p:spTgt spid="18"/>
-                                        </p:tgtEl>
-                                        <p:attrNameLst>
-                                          <p:attrName>style.visibility</p:attrName>
-                                        </p:attrNameLst>
-                                      </p:cBhvr>
-                                      <p:to>
-                                        <p:strVal val="visible"/>
-                                      </p:to>
-                                    </p:set>
-                                    <p:animEffect transition="in" filter="fade">
-                                      <p:cBhvr>
-                                        <p:cTn id="58" dur="550"/>
-                                        <p:tgtEl>
-                                          <p:spTgt spid="18"/>
-                                        </p:tgtEl>
-                                      </p:cBhvr>
-                                    </p:animEffect>
-                                    <p:anim calcmode="lin" valueType="num">
-                                      <p:cBhvr additive="base">
-                                        <p:cTn id="59" dur="550" fill="hold"/>
-                                        <p:tgtEl>
-                                          <p:spTgt spid="18"/>
-                                        </p:tgtEl>
-                                        <p:attrNameLst>
-                                          <p:attrName>ppt_x</p:attrName>
-                                        </p:attrNameLst>
-                                      </p:cBhvr>
-                                      <p:tavLst>
-                                        <p:tav tm="0">
-                                          <p:val>
-                                            <p:strVal val="#ppt_x"/>
-                                          </p:val>
-                                        </p:tav>
-                                        <p:tav tm="100000">
-                                          <p:val>
-                                            <p:strVal val="#ppt_x"/>
-                                          </p:val>
-                                        </p:tav>
-                                      </p:tavLst>
-                                    </p:anim>
-                                    <p:anim calcmode="lin" valueType="num">
-                                      <p:cBhvr additive="base">
-                                        <p:cTn id="60" dur="550" fill="hold"/>
-                                        <p:tgtEl>
-                                          <p:spTgt spid="18"/>
-                                        </p:tgtEl>
-                                        <p:attrNameLst>
-                                          <p:attrName>ppt_y</p:attrName>
-                                        </p:attrNameLst>
-                                      </p:cBhvr>
-                                      <p:tavLst>
-                                        <p:tav tm="0">
-                                          <p:val>
-                                            <p:strVal val="#ppt_y+.08"/>
-                                          </p:val>
-                                        </p:tav>
-                                        <p:tav tm="100000">
-                                          <p:val>
-                                            <p:strVal val="#ppt_y"/>
-                                          </p:val>
-                                        </p:tav>
-                                      </p:tavLst>
-                                    </p:anim>
-                                  </p:childTnLst>
-                                </p:cTn>
-                              </p:par>
-                            </p:childTnLst>
-                          </p:cTn>
-                        </p:par>
-                        <p:par>
-                          <p:cTn id="61" fill="hold">
-                            <p:stCondLst>
-                              <p:cond delay="660"/>
-                            </p:stCondLst>
-                            <p:childTnLst>
-                              <p:par>
-                                <p:cTn id="62" presetID="42" presetClass="entr" presetSubtype="0" fill="hold" grpId="0" nodeType="afterEffect">
-                                  <p:stCondLst>
-                                    <p:cond delay="0"/>
-                                  </p:stCondLst>
-                                  <p:childTnLst>
-                                    <p:set>
-                                      <p:cBhvr>
-                                        <p:cTn id="63" dur="1" fill="hold">
-                                          <p:stCondLst>
-                                            <p:cond delay="0"/>
-                                          </p:stCondLst>
-                                        </p:cTn>
-                                        <p:tgtEl>
-                                          <p:spTgt spid="19"/>
-                                        </p:tgtEl>
-                                        <p:attrNameLst>
-                                          <p:attrName>style.visibility</p:attrName>
-                                        </p:attrNameLst>
-                                      </p:cBhvr>
-                                      <p:to>
-                                        <p:strVal val="visible"/>
-                                      </p:to>
-                                    </p:set>
-                                    <p:animEffect transition="in" filter="fade">
-                                      <p:cBhvr>
-                                        <p:cTn id="64" dur="550"/>
-                                        <p:tgtEl>
-                                          <p:spTgt spid="19"/>
-                                        </p:tgtEl>
-                                      </p:cBhvr>
-                                    </p:animEffect>
-                                    <p:anim calcmode="lin" valueType="num">
-                                      <p:cBhvr additive="base">
-                                        <p:cTn id="65" dur="550" fill="hold"/>
-                                        <p:tgtEl>
-                                          <p:spTgt spid="19"/>
-                                        </p:tgtEl>
-                                        <p:attrNameLst>
-                                          <p:attrName>ppt_x</p:attrName>
-                                        </p:attrNameLst>
-                                      </p:cBhvr>
-                                      <p:tavLst>
-                                        <p:tav tm="0">
-                                          <p:val>
-                                            <p:strVal val="#ppt_x"/>
-                                          </p:val>
-                                        </p:tav>
-                                        <p:tav tm="100000">
-                                          <p:val>
-                                            <p:strVal val="#ppt_x"/>
-                                          </p:val>
-                                        </p:tav>
-                                      </p:tavLst>
-                                    </p:anim>
-                                    <p:anim calcmode="lin" valueType="num">
-                                      <p:cBhvr additive="base">
-                                        <p:cTn id="66" dur="550" fill="hold"/>
-                                        <p:tgtEl>
-                                          <p:spTgt spid="19"/>
-                                        </p:tgtEl>
-                                        <p:attrNameLst>
-                                          <p:attrName>ppt_y</p:attrName>
-                                        </p:attrNameLst>
-                                      </p:cBhvr>
-                                      <p:tavLst>
-                                        <p:tav tm="0">
-                                          <p:val>
-                                            <p:strVal val="#ppt_y+.08"/>
-                                          </p:val>
-                                        </p:tav>
-                                        <p:tav tm="100000">
-                                          <p:val>
-                                            <p:strVal val="#ppt_y"/>
-                                          </p:val>
-                                        </p:tav>
-                                      </p:tavLst>
-                                    </p:anim>
-                                  </p:childTnLst>
-                                </p:cTn>
-                              </p:par>
-                            </p:childTnLst>
-                          </p:cTn>
-                        </p:par>
-                        <p:par>
-                          <p:cTn id="67" fill="hold">
-                            <p:stCondLst>
-                              <p:cond delay="660"/>
-                            </p:stCondLst>
-                            <p:childTnLst>
-                              <p:par>
-                                <p:cTn id="68" presetID="53" presetClass="entr" presetSubtype="16" fill="hold" grpId="0" nodeType="afterEffect">
-                                  <p:stCondLst>
-                                    <p:cond delay="0"/>
-                                  </p:stCondLst>
-                                  <p:childTnLst>
-                                    <p:set>
-                                      <p:cBhvr>
-                                        <p:cTn id="69" dur="1" fill="hold">
-                                          <p:stCondLst>
-                                            <p:cond delay="0"/>
-                                          </p:stCondLst>
-                                        </p:cTn>
-                                        <p:tgtEl>
-                                          <p:spTgt spid="20"/>
-                                        </p:tgtEl>
-                                        <p:attrNameLst>
-                                          <p:attrName>style.visibility</p:attrName>
-                                        </p:attrNameLst>
-                                      </p:cBhvr>
-                                      <p:to>
-                                        <p:strVal val="visible"/>
-                                      </p:to>
-                                    </p:set>
-                                    <p:animEffect transition="in" filter="fade">
-                                      <p:cBhvr>
-                                        <p:cTn id="70" dur="550"/>
-                                        <p:tgtEl>
-                                          <p:spTgt spid="20"/>
-                                        </p:tgtEl>
-                                      </p:cBhvr>
-                                    </p:animEffect>
-                                    <p:anim calcmode="lin" valueType="num">
-                                      <p:cBhvr additive="base">
-                                        <p:cTn id="71" dur="550" fill="hold"/>
-                                        <p:tgtEl>
-                                          <p:spTgt spid="20"/>
-                                        </p:tgtEl>
-                                        <p:attrNameLst>
-                                          <p:attrName>ppt_w</p:attrName>
-                                        </p:attrNameLst>
-                                      </p:cBhvr>
-                                      <p:tavLst>
-                                        <p:tav tm="0">
-                                          <p:val>
-                                            <p:strVal val="0"/>
-                                          </p:val>
-                                        </p:tav>
-                                        <p:tav tm="100000">
-                                          <p:val>
-                                            <p:strVal val="#ppt_w"/>
-                                          </p:val>
-                                        </p:tav>
-                                      </p:tavLst>
-                                    </p:anim>
-                                    <p:anim calcmode="lin" valueType="num">
-                                      <p:cBhvr additive="base">
-                                        <p:cTn id="72" dur="550" fill="hold"/>
-                                        <p:tgtEl>
-                                          <p:spTgt spid="20"/>
-                                        </p:tgtEl>
-                                        <p:attrNameLst>
-                                          <p:attrName>ppt_h</p:attrName>
-                                        </p:attrNameLst>
-                                      </p:cBhvr>
-                                      <p:tavLst>
-                                        <p:tav tm="0">
-                                          <p:val>
-                                            <p:strVal val="0"/>
-                                          </p:val>
-                                        </p:tav>
-                                        <p:tav tm="100000">
-                                          <p:val>
-                                            <p:strVal val="#ppt_h"/>
-                                          </p:val>
-                                        </p:tav>
-                                      </p:tavLst>
-                                    </p:anim>
-                                  </p:childTnLst>
-                                </p:cTn>
-                              </p:par>
-                            </p:childTnLst>
-                          </p:cTn>
-                        </p:par>
-                        <p:par>
-                          <p:cTn id="73" fill="hold">
-                            <p:stCondLst>
-                              <p:cond delay="660"/>
-                            </p:stCondLst>
-                            <p:childTnLst>
-                              <p:par>
-                                <p:cTn id="74" presetID="42" presetClass="entr" presetSubtype="0" fill="hold" grpId="0" nodeType="afterEffect">
-                                  <p:stCondLst>
-                                    <p:cond delay="0"/>
-                                  </p:stCondLst>
-                                  <p:childTnLst>
-                                    <p:set>
-                                      <p:cBhvr>
-                                        <p:cTn id="75" dur="1" fill="hold">
-                                          <p:stCondLst>
-                                            <p:cond delay="0"/>
-                                          </p:stCondLst>
-                                        </p:cTn>
-                                        <p:tgtEl>
-                                          <p:spTgt spid="21"/>
-                                        </p:tgtEl>
-                                        <p:attrNameLst>
-                                          <p:attrName>style.visibility</p:attrName>
-                                        </p:attrNameLst>
-                                      </p:cBhvr>
-                                      <p:to>
-                                        <p:strVal val="visible"/>
-                                      </p:to>
-                                    </p:set>
-                                    <p:animEffect transition="in" filter="fade">
-                                      <p:cBhvr>
-                                        <p:cTn id="76" dur="550"/>
-                                        <p:tgtEl>
-                                          <p:spTgt spid="21"/>
-                                        </p:tgtEl>
-                                      </p:cBhvr>
-                                    </p:animEffect>
-                                    <p:anim calcmode="lin" valueType="num">
-                                      <p:cBhvr additive="base">
-                                        <p:cTn id="77" dur="550" fill="hold"/>
-                                        <p:tgtEl>
-                                          <p:spTgt spid="21"/>
-                                        </p:tgtEl>
-                                        <p:attrNameLst>
-                                          <p:attrName>ppt_x</p:attrName>
-                                        </p:attrNameLst>
-                                      </p:cBhvr>
-                                      <p:tavLst>
-                                        <p:tav tm="0">
-                                          <p:val>
-                                            <p:strVal val="#ppt_x"/>
-                                          </p:val>
-                                        </p:tav>
-                                        <p:tav tm="100000">
-                                          <p:val>
-                                            <p:strVal val="#ppt_x"/>
-                                          </p:val>
-                                        </p:tav>
-                                      </p:tavLst>
-                                    </p:anim>
-                                    <p:anim calcmode="lin" valueType="num">
-                                      <p:cBhvr additive="base">
-                                        <p:cTn id="78" dur="550" fill="hold"/>
-                                        <p:tgtEl>
-                                          <p:spTgt spid="21"/>
-                                        </p:tgtEl>
-                                        <p:attrNameLst>
-                                          <p:attrName>ppt_y</p:attrName>
-                                        </p:attrNameLst>
-                                      </p:cBhvr>
-                                      <p:tavLst>
-                                        <p:tav tm="0">
-                                          <p:val>
-                                            <p:strVal val="#ppt_y+.08"/>
-                                          </p:val>
-                                        </p:tav>
-                                        <p:tav tm="100000">
-                                          <p:val>
-                                            <p:strVal val="#ppt_y"/>
-                                          </p:val>
-                                        </p:tav>
-                                      </p:tavLst>
-                                    </p:anim>
-                                  </p:childTnLst>
-                                </p:cTn>
-                              </p:par>
-                            </p:childTnLst>
-                          </p:cTn>
-                        </p:par>
-                        <p:par>
-                          <p:cTn id="79" fill="hold">
-                            <p:stCondLst>
-                              <p:cond delay="880"/>
-                            </p:stCondLst>
-                            <p:childTnLst>
-                              <p:par>
-                                <p:cTn id="80" presetID="42" presetClass="entr" presetSubtype="0" fill="hold" grpId="0" nodeType="afterEffect">
-                                  <p:stCondLst>
-                                    <p:cond delay="0"/>
-                                  </p:stCondLst>
-                                  <p:childTnLst>
-                                    <p:set>
-                                      <p:cBhvr>
-                                        <p:cTn id="81" dur="1" fill="hold">
-                                          <p:stCondLst>
-                                            <p:cond delay="0"/>
-                                          </p:stCondLst>
-                                        </p:cTn>
-                                        <p:tgtEl>
-                                          <p:spTgt spid="22"/>
-                                        </p:tgtEl>
-                                        <p:attrNameLst>
-                                          <p:attrName>style.visibility</p:attrName>
-                                        </p:attrNameLst>
-                                      </p:cBhvr>
-                                      <p:to>
-                                        <p:strVal val="visible"/>
-                                      </p:to>
-                                    </p:set>
-                                    <p:animEffect transition="in" filter="fade">
-                                      <p:cBhvr>
-                                        <p:cTn id="82" dur="550"/>
-                                        <p:tgtEl>
-                                          <p:spTgt spid="22"/>
-                                        </p:tgtEl>
-                                      </p:cBhvr>
-                                    </p:animEffect>
-                                    <p:anim calcmode="lin" valueType="num">
-                                      <p:cBhvr additive="base">
-                                        <p:cTn id="83" dur="550" fill="hold"/>
-                                        <p:tgtEl>
-                                          <p:spTgt spid="22"/>
-                                        </p:tgtEl>
-                                        <p:attrNameLst>
-                                          <p:attrName>ppt_x</p:attrName>
-                                        </p:attrNameLst>
-                                      </p:cBhvr>
-                                      <p:tavLst>
-                                        <p:tav tm="0">
-                                          <p:val>
-                                            <p:strVal val="#ppt_x"/>
-                                          </p:val>
-                                        </p:tav>
-                                        <p:tav tm="100000">
-                                          <p:val>
-                                            <p:strVal val="#ppt_x"/>
-                                          </p:val>
-                                        </p:tav>
-                                      </p:tavLst>
-                                    </p:anim>
-                                    <p:anim calcmode="lin" valueType="num">
-                                      <p:cBhvr additive="base">
-                                        <p:cTn id="84" dur="550" fill="hold"/>
-                                        <p:tgtEl>
-                                          <p:spTgt spid="22"/>
-                                        </p:tgtEl>
-                                        <p:attrNameLst>
-                                          <p:attrName>ppt_y</p:attrName>
-                                        </p:attrNameLst>
-                                      </p:cBhvr>
-                                      <p:tavLst>
-                                        <p:tav tm="0">
-                                          <p:val>
-                                            <p:strVal val="#ppt_y+.08"/>
-                                          </p:val>
-                                        </p:tav>
-                                        <p:tav tm="100000">
-                                          <p:val>
-                                            <p:strVal val="#ppt_y"/>
-                                          </p:val>
-                                        </p:tav>
-                                      </p:tavLst>
-                                    </p:anim>
-                                  </p:childTnLst>
-                                </p:cTn>
-                              </p:par>
-                            </p:childTnLst>
-                          </p:cTn>
-                        </p:par>
-                        <p:par>
-                          <p:cTn id="85" fill="hold">
-                            <p:stCondLst>
-                              <p:cond delay="880"/>
-                            </p:stCondLst>
-                            <p:childTnLst>
-                              <p:par>
-                                <p:cTn id="86" presetID="42" presetClass="entr" presetSubtype="0" fill="hold" grpId="0" nodeType="afterEffect">
-                                  <p:stCondLst>
-                                    <p:cond delay="0"/>
-                                  </p:stCondLst>
-                                  <p:childTnLst>
-                                    <p:set>
-                                      <p:cBhvr>
-                                        <p:cTn id="87" dur="1" fill="hold">
-                                          <p:stCondLst>
-                                            <p:cond delay="0"/>
-                                          </p:stCondLst>
-                                        </p:cTn>
-                                        <p:tgtEl>
-                                          <p:spTgt spid="23"/>
-                                        </p:tgtEl>
-                                        <p:attrNameLst>
-                                          <p:attrName>style.visibility</p:attrName>
-                                        </p:attrNameLst>
-                                      </p:cBhvr>
-                                      <p:to>
-                                        <p:strVal val="visible"/>
-                                      </p:to>
-                                    </p:set>
-                                    <p:animEffect transition="in" filter="fade">
-                                      <p:cBhvr>
-                                        <p:cTn id="88" dur="550"/>
-                                        <p:tgtEl>
-                                          <p:spTgt spid="23"/>
-                                        </p:tgtEl>
-                                      </p:cBhvr>
-                                    </p:animEffect>
-                                    <p:anim calcmode="lin" valueType="num">
-                                      <p:cBhvr additive="base">
-                                        <p:cTn id="89" dur="550" fill="hold"/>
-                                        <p:tgtEl>
-                                          <p:spTgt spid="23"/>
-                                        </p:tgtEl>
-                                        <p:attrNameLst>
-                                          <p:attrName>ppt_x</p:attrName>
-                                        </p:attrNameLst>
-                                      </p:cBhvr>
-                                      <p:tavLst>
-                                        <p:tav tm="0">
-                                          <p:val>
-                                            <p:strVal val="#ppt_x"/>
-                                          </p:val>
-                                        </p:tav>
-                                        <p:tav tm="100000">
-                                          <p:val>
-                                            <p:strVal val="#ppt_x"/>
-                                          </p:val>
-                                        </p:tav>
-                                      </p:tavLst>
-                                    </p:anim>
-                                    <p:anim calcmode="lin" valueType="num">
-                                      <p:cBhvr additive="base">
-                                        <p:cTn id="90" dur="550" fill="hold"/>
-                                        <p:tgtEl>
-                                          <p:spTgt spid="23"/>
-                                        </p:tgtEl>
-                                        <p:attrNameLst>
-                                          <p:attrName>ppt_y</p:attrName>
-                                        </p:attrNameLst>
-                                      </p:cBhvr>
-                                      <p:tavLst>
-                                        <p:tav tm="0">
-                                          <p:val>
-                                            <p:strVal val="#ppt_y+.08"/>
-                                          </p:val>
-                                        </p:tav>
-                                        <p:tav tm="100000">
-                                          <p:val>
-                                            <p:strVal val="#ppt_y"/>
-                                          </p:val>
-                                        </p:tav>
-                                      </p:tavLst>
-                                    </p:anim>
-                                  </p:childTnLst>
-                                </p:cTn>
-                              </p:par>
-                            </p:childTnLst>
-                          </p:cTn>
-                        </p:par>
-                        <p:par>
-                          <p:cTn id="91" fill="hold">
-                            <p:stCondLst>
-                              <p:cond delay="880"/>
-                            </p:stCondLst>
-                            <p:childTnLst>
-                              <p:par>
-                                <p:cTn id="92" presetID="53" presetClass="entr" presetSubtype="16" fill="hold" grpId="0" nodeType="afterEffect">
-                                  <p:stCondLst>
-                                    <p:cond delay="0"/>
-                                  </p:stCondLst>
-                                  <p:childTnLst>
-                                    <p:set>
-                                      <p:cBhvr>
-                                        <p:cTn id="93" dur="1" fill="hold">
-                                          <p:stCondLst>
-                                            <p:cond delay="0"/>
-                                          </p:stCondLst>
-                                        </p:cTn>
-                                        <p:tgtEl>
-                                          <p:spTgt spid="24"/>
-                                        </p:tgtEl>
-                                        <p:attrNameLst>
-                                          <p:attrName>style.visibility</p:attrName>
-                                        </p:attrNameLst>
-                                      </p:cBhvr>
-                                      <p:to>
-                                        <p:strVal val="visible"/>
-                                      </p:to>
-                                    </p:set>
-                                    <p:animEffect transition="in" filter="fade">
-                                      <p:cBhvr>
-                                        <p:cTn id="94" dur="550"/>
-                                        <p:tgtEl>
-                                          <p:spTgt spid="24"/>
-                                        </p:tgtEl>
-                                      </p:cBhvr>
-                                    </p:animEffect>
-                                    <p:anim calcmode="lin" valueType="num">
-                                      <p:cBhvr additive="base">
-                                        <p:cTn id="95" dur="550" fill="hold"/>
-                                        <p:tgtEl>
-                                          <p:spTgt spid="24"/>
-                                        </p:tgtEl>
-                                        <p:attrNameLst>
-                                          <p:attrName>ppt_w</p:attrName>
-                                        </p:attrNameLst>
-                                      </p:cBhvr>
-                                      <p:tavLst>
-                                        <p:tav tm="0">
-                                          <p:val>
-                                            <p:strVal val="0"/>
-                                          </p:val>
-                                        </p:tav>
-                                        <p:tav tm="100000">
-                                          <p:val>
-                                            <p:strVal val="#ppt_w"/>
-                                          </p:val>
-                                        </p:tav>
-                                      </p:tavLst>
-                                    </p:anim>
-                                    <p:anim calcmode="lin" valueType="num">
-                                      <p:cBhvr additive="base">
-                                        <p:cTn id="96" dur="550" fill="hold"/>
-                                        <p:tgtEl>
-                                          <p:spTgt spid="24"/>
-                                        </p:tgtEl>
-                                        <p:attrNameLst>
-                                          <p:attrName>ppt_h</p:attrName>
-                                        </p:attrNameLst>
-                                      </p:cBhvr>
-                                      <p:tavLst>
-                                        <p:tav tm="0">
-                                          <p:val>
-                                            <p:strVal val="0"/>
-                                          </p:val>
-                                        </p:tav>
-                                        <p:tav tm="100000">
-                                          <p:val>
-                                            <p:strVal val="#ppt_h"/>
-                                          </p:val>
-                                        </p:tav>
-                                      </p:tavLst>
-                                    </p:anim>
-                                  </p:childTnLst>
-                                </p:cTn>
-                              </p:par>
-                            </p:childTnLst>
-                          </p:cTn>
-                        </p:par>
-                        <p:par>
-                          <p:cTn id="97" fill="hold">
-                            <p:stCondLst>
-                              <p:cond delay="880"/>
-                            </p:stCondLst>
-                            <p:childTnLst>
-                              <p:par>
-                                <p:cTn id="98" presetID="42" presetClass="entr" presetSubtype="0" fill="hold" grpId="0" nodeType="afterEffect">
-                                  <p:stCondLst>
-                                    <p:cond delay="0"/>
-                                  </p:stCondLst>
-                                  <p:childTnLst>
-                                    <p:set>
-                                      <p:cBhvr>
-                                        <p:cTn id="99" dur="1" fill="hold">
-                                          <p:stCondLst>
-                                            <p:cond delay="0"/>
-                                          </p:stCondLst>
-                                        </p:cTn>
-                                        <p:tgtEl>
-                                          <p:spTgt spid="25"/>
-                                        </p:tgtEl>
-                                        <p:attrNameLst>
-                                          <p:attrName>style.visibility</p:attrName>
-                                        </p:attrNameLst>
-                                      </p:cBhvr>
-                                      <p:to>
-                                        <p:strVal val="visible"/>
-                                      </p:to>
-                                    </p:set>
-                                    <p:animEffect transition="in" filter="fade">
-                                      <p:cBhvr>
-                                        <p:cTn id="100" dur="550"/>
-                                        <p:tgtEl>
-                                          <p:spTgt spid="25"/>
-                                        </p:tgtEl>
-                                      </p:cBhvr>
-                                    </p:animEffect>
-                                    <p:anim calcmode="lin" valueType="num">
-                                      <p:cBhvr additive="base">
-                                        <p:cTn id="101" dur="550" fill="hold"/>
-                                        <p:tgtEl>
-                                          <p:spTgt spid="25"/>
-                                        </p:tgtEl>
-                                        <p:attrNameLst>
-                                          <p:attrName>ppt_x</p:attrName>
-                                        </p:attrNameLst>
-                                      </p:cBhvr>
-                                      <p:tavLst>
-                                        <p:tav tm="0">
-                                          <p:val>
-                                            <p:strVal val="#ppt_x"/>
-                                          </p:val>
-                                        </p:tav>
-                                        <p:tav tm="100000">
-                                          <p:val>
-                                            <p:strVal val="#ppt_x"/>
-                                          </p:val>
-                                        </p:tav>
-                                      </p:tavLst>
-                                    </p:anim>
-                                    <p:anim calcmode="lin" valueType="num">
-                                      <p:cBhvr additive="base">
-                                        <p:cTn id="102" dur="550" fill="hold"/>
-                                        <p:tgtEl>
-                                          <p:spTgt spid="25"/>
-                                        </p:tgtEl>
-                                        <p:attrNameLst>
-                                          <p:attrName>ppt_y</p:attrName>
-                                        </p:attrNameLst>
-                                      </p:cBhvr>
-                                      <p:tavLst>
-                                        <p:tav tm="0">
-                                          <p:val>
-                                            <p:strVal val="#ppt_y+.08"/>
-                                          </p:val>
-                                        </p:tav>
-                                        <p:tav tm="100000">
-                                          <p:val>
-                                            <p:strVal val="#ppt_y"/>
-                                          </p:val>
-                                        </p:tav>
-                                      </p:tavLst>
-                                    </p:anim>
-                                  </p:childTnLst>
-                                </p:cTn>
-                              </p:par>
-                            </p:childTnLst>
-                          </p:cTn>
-                        </p:par>
-                        <p:par>
-                          <p:cTn id="103" fill="hold">
-                            <p:stCondLst>
-                              <p:cond delay="1100"/>
-                            </p:stCondLst>
-                            <p:childTnLst>
-                              <p:par>
-                                <p:cTn id="104" presetID="42" presetClass="entr" presetSubtype="0" fill="hold" grpId="0" nodeType="afterEffect">
-                                  <p:stCondLst>
-                                    <p:cond delay="0"/>
-                                  </p:stCondLst>
-                                  <p:childTnLst>
-                                    <p:set>
-                                      <p:cBhvr>
-                                        <p:cTn id="105" dur="1" fill="hold">
-                                          <p:stCondLst>
-                                            <p:cond delay="0"/>
-                                          </p:stCondLst>
-                                        </p:cTn>
-                                        <p:tgtEl>
-                                          <p:spTgt spid="26"/>
-                                        </p:tgtEl>
-                                        <p:attrNameLst>
-                                          <p:attrName>style.visibility</p:attrName>
-                                        </p:attrNameLst>
-                                      </p:cBhvr>
-                                      <p:to>
-                                        <p:strVal val="visible"/>
-                                      </p:to>
-                                    </p:set>
-                                    <p:animEffect transition="in" filter="fade">
-                                      <p:cBhvr>
-                                        <p:cTn id="106" dur="550"/>
-                                        <p:tgtEl>
-                                          <p:spTgt spid="26"/>
-                                        </p:tgtEl>
-                                      </p:cBhvr>
-                                    </p:animEffect>
-                                    <p:anim calcmode="lin" valueType="num">
-                                      <p:cBhvr additive="base">
-                                        <p:cTn id="107" dur="550" fill="hold"/>
-                                        <p:tgtEl>
-                                          <p:spTgt spid="26"/>
-                                        </p:tgtEl>
-                                        <p:attrNameLst>
-                                          <p:attrName>ppt_x</p:attrName>
-                                        </p:attrNameLst>
-                                      </p:cBhvr>
-                                      <p:tavLst>
-                                        <p:tav tm="0">
-                                          <p:val>
-                                            <p:strVal val="#ppt_x"/>
-                                          </p:val>
-                                        </p:tav>
-                                        <p:tav tm="100000">
-                                          <p:val>
-                                            <p:strVal val="#ppt_x"/>
-                                          </p:val>
-                                        </p:tav>
-                                      </p:tavLst>
-                                    </p:anim>
-                                    <p:anim calcmode="lin" valueType="num">
-                                      <p:cBhvr additive="base">
-                                        <p:cTn id="108" dur="550" fill="hold"/>
-                                        <p:tgtEl>
-                                          <p:spTgt spid="26"/>
-                                        </p:tgtEl>
-                                        <p:attrNameLst>
-                                          <p:attrName>ppt_y</p:attrName>
-                                        </p:attrNameLst>
-                                      </p:cBhvr>
-                                      <p:tavLst>
-                                        <p:tav tm="0">
-                                          <p:val>
-                                            <p:strVal val="#ppt_y+.08"/>
-                                          </p:val>
-                                        </p:tav>
-                                        <p:tav tm="100000">
-                                          <p:val>
-                                            <p:strVal val="#ppt_y"/>
-                                          </p:val>
-                                        </p:tav>
-                                      </p:tavLst>
-                                    </p:anim>
-                                  </p:childTnLst>
-                                </p:cTn>
-                              </p:par>
-                            </p:childTnLst>
-                          </p:cTn>
-                        </p:par>
-                        <p:par>
-                          <p:cTn id="109" fill="hold">
-                            <p:stCondLst>
-                              <p:cond delay="1100"/>
-                            </p:stCondLst>
-                            <p:childTnLst>
-                              <p:par>
-                                <p:cTn id="110" presetID="42" presetClass="entr" presetSubtype="0" fill="hold" grpId="0" nodeType="afterEffect">
-                                  <p:stCondLst>
-                                    <p:cond delay="0"/>
-                                  </p:stCondLst>
-                                  <p:childTnLst>
-                                    <p:set>
-                                      <p:cBhvr>
-                                        <p:cTn id="111" dur="1" fill="hold">
-                                          <p:stCondLst>
-                                            <p:cond delay="0"/>
-                                          </p:stCondLst>
-                                        </p:cTn>
-                                        <p:tgtEl>
-                                          <p:spTgt spid="27"/>
-                                        </p:tgtEl>
-                                        <p:attrNameLst>
-                                          <p:attrName>style.visibility</p:attrName>
-                                        </p:attrNameLst>
-                                      </p:cBhvr>
-                                      <p:to>
-                                        <p:strVal val="visible"/>
-                                      </p:to>
-                                    </p:set>
-                                    <p:animEffect transition="in" filter="fade">
-                                      <p:cBhvr>
-                                        <p:cTn id="112" dur="550"/>
-                                        <p:tgtEl>
-                                          <p:spTgt spid="27"/>
-                                        </p:tgtEl>
-                                      </p:cBhvr>
-                                    </p:animEffect>
-                                    <p:anim calcmode="lin" valueType="num">
-                                      <p:cBhvr additive="base">
-                                        <p:cTn id="113" dur="550" fill="hold"/>
-                                        <p:tgtEl>
-                                          <p:spTgt spid="27"/>
-                                        </p:tgtEl>
-                                        <p:attrNameLst>
-                                          <p:attrName>ppt_x</p:attrName>
-                                        </p:attrNameLst>
-                                      </p:cBhvr>
-                                      <p:tavLst>
-                                        <p:tav tm="0">
-                                          <p:val>
-                                            <p:strVal val="#ppt_x"/>
-                                          </p:val>
-                                        </p:tav>
-                                        <p:tav tm="100000">
-                                          <p:val>
-                                            <p:strVal val="#ppt_x"/>
-                                          </p:val>
-                                        </p:tav>
-                                      </p:tavLst>
-                                    </p:anim>
-                                    <p:anim calcmode="lin" valueType="num">
-                                      <p:cBhvr additive="base">
-                                        <p:cTn id="114" dur="550" fill="hold"/>
-                                        <p:tgtEl>
-                                          <p:spTgt spid="27"/>
-                                        </p:tgtEl>
-                                        <p:attrNameLst>
-                                          <p:attrName>ppt_y</p:attrName>
-                                        </p:attrNameLst>
-                                      </p:cBhvr>
-                                      <p:tavLst>
-                                        <p:tav tm="0">
-                                          <p:val>
-                                            <p:strVal val="#ppt_y+.08"/>
-                                          </p:val>
-                                        </p:tav>
-                                        <p:tav tm="100000">
-                                          <p:val>
-                                            <p:strVal val="#ppt_y"/>
-                                          </p:val>
-                                        </p:tav>
-                                      </p:tavLst>
-                                    </p:anim>
-                                  </p:childTnLst>
-                                </p:cTn>
-                              </p:par>
-                            </p:childTnLst>
-                          </p:cTn>
-                        </p:par>
-                        <p:par>
-                          <p:cTn id="115" fill="hold">
-                            <p:stCondLst>
-                              <p:cond delay="1100"/>
-                            </p:stCondLst>
-                            <p:childTnLst>
-                              <p:par>
-                                <p:cTn id="116" presetID="53" presetClass="entr" presetSubtype="16" fill="hold" grpId="0" nodeType="afterEffect">
-                                  <p:stCondLst>
-                                    <p:cond delay="0"/>
-                                  </p:stCondLst>
-                                  <p:childTnLst>
-                                    <p:set>
-                                      <p:cBhvr>
-                                        <p:cTn id="117" dur="1" fill="hold">
-                                          <p:stCondLst>
-                                            <p:cond delay="0"/>
-                                          </p:stCondLst>
-                                        </p:cTn>
-                                        <p:tgtEl>
-                                          <p:spTgt spid="28"/>
-                                        </p:tgtEl>
-                                        <p:attrNameLst>
-                                          <p:attrName>style.visibility</p:attrName>
-                                        </p:attrNameLst>
-                                      </p:cBhvr>
-                                      <p:to>
-                                        <p:strVal val="visible"/>
-                                      </p:to>
-                                    </p:set>
-                                    <p:animEffect transition="in" filter="fade">
-                                      <p:cBhvr>
-                                        <p:cTn id="118" dur="550"/>
-                                        <p:tgtEl>
-                                          <p:spTgt spid="28"/>
-                                        </p:tgtEl>
-                                      </p:cBhvr>
-                                    </p:animEffect>
-                                    <p:anim calcmode="lin" valueType="num">
-                                      <p:cBhvr additive="base">
-                                        <p:cTn id="119" dur="550" fill="hold"/>
-                                        <p:tgtEl>
-                                          <p:spTgt spid="28"/>
-                                        </p:tgtEl>
-                                        <p:attrNameLst>
-                                          <p:attrName>ppt_w</p:attrName>
-                                        </p:attrNameLst>
-                                      </p:cBhvr>
-                                      <p:tavLst>
-                                        <p:tav tm="0">
-                                          <p:val>
-                                            <p:strVal val="0"/>
-                                          </p:val>
-                                        </p:tav>
-                                        <p:tav tm="100000">
-                                          <p:val>
-                                            <p:strVal val="#ppt_w"/>
-                                          </p:val>
-                                        </p:tav>
-                                      </p:tavLst>
-                                    </p:anim>
-                                    <p:anim calcmode="lin" valueType="num">
-                                      <p:cBhvr additive="base">
-                                        <p:cTn id="120" dur="550" fill="hold"/>
-                                        <p:tgtEl>
-                                          <p:spTgt spid="28"/>
-                                        </p:tgtEl>
-                                        <p:attrNameLst>
-                                          <p:attrName>ppt_h</p:attrName>
-                                        </p:attrNameLst>
-                                      </p:cBhvr>
-                                      <p:tavLst>
-                                        <p:tav tm="0">
-                                          <p:val>
-                                            <p:strVal val="0"/>
-                                          </p:val>
-                                        </p:tav>
-                                        <p:tav tm="100000">
-                                          <p:val>
-                                            <p:strVal val="#ppt_h"/>
-                                          </p:val>
-                                        </p:tav>
-                                      </p:tavLst>
-                                    </p:anim>
-                                  </p:childTnLst>
-                                </p:cTn>
-                              </p:par>
-                            </p:childTnLst>
-                          </p:cTn>
-                        </p:par>
-                        <p:par>
-                          <p:cTn id="121" fill="hold">
-                            <p:stCondLst>
-                              <p:cond delay="1100"/>
-                            </p:stCondLst>
-                            <p:childTnLst>
-                              <p:par>
-                                <p:cTn id="122" presetID="42" presetClass="entr" presetSubtype="0" fill="hold" grpId="0" nodeType="afterEffect">
-                                  <p:stCondLst>
-                                    <p:cond delay="0"/>
-                                  </p:stCondLst>
-                                  <p:childTnLst>
-                                    <p:set>
-                                      <p:cBhvr>
-                                        <p:cTn id="123" dur="1" fill="hold">
-                                          <p:stCondLst>
-                                            <p:cond delay="0"/>
-                                          </p:stCondLst>
-                                        </p:cTn>
-                                        <p:tgtEl>
-                                          <p:spTgt spid="29"/>
-                                        </p:tgtEl>
-                                        <p:attrNameLst>
-                                          <p:attrName>style.visibility</p:attrName>
-                                        </p:attrNameLst>
-                                      </p:cBhvr>
-                                      <p:to>
-                                        <p:strVal val="visible"/>
-                                      </p:to>
-                                    </p:set>
-                                    <p:animEffect transition="in" filter="fade">
-                                      <p:cBhvr>
-                                        <p:cTn id="124" dur="550"/>
-                                        <p:tgtEl>
-                                          <p:spTgt spid="29"/>
-                                        </p:tgtEl>
-                                      </p:cBhvr>
-                                    </p:animEffect>
-                                    <p:anim calcmode="lin" valueType="num">
-                                      <p:cBhvr additive="base">
-                                        <p:cTn id="125" dur="550" fill="hold"/>
-                                        <p:tgtEl>
-                                          <p:spTgt spid="29"/>
-                                        </p:tgtEl>
-                                        <p:attrNameLst>
-                                          <p:attrName>ppt_x</p:attrName>
-                                        </p:attrNameLst>
-                                      </p:cBhvr>
-                                      <p:tavLst>
-                                        <p:tav tm="0">
-                                          <p:val>
-                                            <p:strVal val="#ppt_x"/>
-                                          </p:val>
-                                        </p:tav>
-                                        <p:tav tm="100000">
-                                          <p:val>
-                                            <p:strVal val="#ppt_x"/>
-                                          </p:val>
-                                        </p:tav>
-                                      </p:tavLst>
-                                    </p:anim>
-                                    <p:anim calcmode="lin" valueType="num">
-                                      <p:cBhvr additive="base">
-                                        <p:cTn id="126" dur="550" fill="hold"/>
-                                        <p:tgtEl>
-                                          <p:spTgt spid="29"/>
                                         </p:tgtEl>
                                         <p:attrNameLst>
                                           <p:attrName>ppt_y</p:attrName>
@@ -13836,1546 +11605,12 @@
       <p:bldP spid="11" grpId="0" animBg="1"/>
       <p:bldP spid="12" grpId="0" animBg="1"/>
       <p:bldP spid="13" grpId="0" animBg="1"/>
-      <p:bldP spid="14" grpId="0" animBg="1"/>
-      <p:bldP spid="15" grpId="0" animBg="1"/>
-      <p:bldP spid="16" grpId="0" animBg="1"/>
-      <p:bldP spid="17" grpId="0" animBg="1"/>
-      <p:bldP spid="18" grpId="0" animBg="1"/>
-      <p:bldP spid="19" grpId="0" animBg="1"/>
-      <p:bldP spid="20" grpId="0" animBg="1"/>
-      <p:bldP spid="21" grpId="0" animBg="1"/>
-      <p:bldP spid="22" grpId="0" animBg="1"/>
-      <p:bldP spid="23" grpId="0" animBg="1"/>
-      <p:bldP spid="24" grpId="0" animBg="1"/>
-      <p:bldP spid="25" grpId="0" animBg="1"/>
-      <p:bldP spid="26" grpId="0" animBg="1"/>
-      <p:bldP spid="27" grpId="0" animBg="1"/>
-      <p:bldP spid="28" grpId="0" animBg="1"/>
-      <p:bldP spid="29" grpId="0" animBg="1"/>
     </p:bldLst>
   </p:timing>
 </p:sld>
 </file>
 
 <file path=ppt/slides/slide15.xml><?xml version="1.0" encoding="utf-8"?>
-<p:sld xmlns:a="http://schemas.openxmlformats.org/drawingml/2006/main" xmlns:p="http://schemas.openxmlformats.org/presentationml/2006/main" xmlns:r="http://schemas.openxmlformats.org/officeDocument/2006/relationships">
-  <p:cSld>
-    <p:spTree>
-      <p:nvGrpSpPr>
-        <p:cNvPr id="1" name=""/>
-        <p:cNvGrpSpPr/>
-        <p:nvPr/>
-      </p:nvGrpSpPr>
-      <p:grpSpPr/>
-      <p:sp>
-        <p:nvSpPr>
-          <p:cNvPr id="2" name="Rectangle 1"/>
-          <p:cNvSpPr/>
-          <p:nvPr/>
-        </p:nvSpPr>
-        <p:spPr>
-          <a:xfrm>
-            <a:off x="0" y="0"/>
-            <a:ext cx="12192000" cy="1000000"/>
-          </a:xfrm>
-          <a:prstGeom prst="rect">
-            <a:avLst/>
-          </a:prstGeom>
-          <a:gradFill rotWithShape="1">
-            <a:gsLst>
-              <a:gs pos="0">
-                <a:srgbClr val="1F3A5F"/>
-              </a:gs>
-              <a:gs pos="100000">
-                <a:srgbClr val="2D5C8F"/>
-              </a:gs>
-            </a:gsLst>
-            <a:lin scaled="0" ang="0"/>
-          </a:gradFill>
-          <a:ln>
-            <a:noFill/>
-          </a:ln>
-          <a:effectLst/>
-        </p:spPr>
-        <p:style>
-          <a:lnRef idx="1">
-            <a:schemeClr val="accent1"/>
-          </a:lnRef>
-          <a:fillRef idx="3">
-            <a:schemeClr val="accent1"/>
-          </a:fillRef>
-          <a:effectRef idx="2">
-            <a:schemeClr val="accent1"/>
-          </a:effectRef>
-          <a:fontRef idx="minor">
-            <a:schemeClr val="lt1"/>
-          </a:fontRef>
-        </p:style>
-        <p:txBody>
-          <a:bodyPr rtlCol="0" anchor="ctr"/>
-          <a:lstStyle/>
-          <a:p>
-            <a:pPr algn="ctr"/>
-          </a:p>
-        </p:txBody>
-      </p:sp>
-      <p:sp>
-        <p:nvSpPr>
-          <p:cNvPr id="3" name="Oval 2"/>
-          <p:cNvSpPr/>
-          <p:nvPr/>
-        </p:nvSpPr>
-        <p:spPr>
-          <a:xfrm>
-            <a:off x="11050000" y="-350000"/>
-            <a:ext cx="900000" cy="900000"/>
-          </a:xfrm>
-          <a:prstGeom prst="ellipse">
-            <a:avLst/>
-          </a:prstGeom>
-          <a:solidFill>
-            <a:srgbClr val="3B6EA5"/>
-          </a:solidFill>
-          <a:ln>
-            <a:noFill/>
-          </a:ln>
-          <a:effectLst/>
-        </p:spPr>
-        <p:style>
-          <a:lnRef idx="1">
-            <a:schemeClr val="accent1"/>
-          </a:lnRef>
-          <a:fillRef idx="3">
-            <a:schemeClr val="accent1"/>
-          </a:fillRef>
-          <a:effectRef idx="2">
-            <a:schemeClr val="accent1"/>
-          </a:effectRef>
-          <a:fontRef idx="minor">
-            <a:schemeClr val="lt1"/>
-          </a:fontRef>
-        </p:style>
-        <p:txBody>
-          <a:bodyPr rtlCol="0" anchor="ctr"/>
-          <a:lstStyle/>
-          <a:p>
-            <a:pPr algn="ctr"/>
-          </a:p>
-        </p:txBody>
-      </p:sp>
-      <p:sp>
-        <p:nvSpPr>
-          <p:cNvPr id="4" name="Oval 3"/>
-          <p:cNvSpPr/>
-          <p:nvPr/>
-        </p:nvSpPr>
-        <p:spPr>
-          <a:xfrm>
-            <a:off x="11550000" y="450000"/>
-            <a:ext cx="420000" cy="420000"/>
-          </a:xfrm>
-          <a:prstGeom prst="ellipse">
-            <a:avLst/>
-          </a:prstGeom>
-          <a:solidFill>
-            <a:srgbClr val="0F8B8D"/>
-          </a:solidFill>
-          <a:ln>
-            <a:noFill/>
-          </a:ln>
-          <a:effectLst/>
-        </p:spPr>
-        <p:style>
-          <a:lnRef idx="1">
-            <a:schemeClr val="accent1"/>
-          </a:lnRef>
-          <a:fillRef idx="3">
-            <a:schemeClr val="accent1"/>
-          </a:fillRef>
-          <a:effectRef idx="2">
-            <a:schemeClr val="accent1"/>
-          </a:effectRef>
-          <a:fontRef idx="minor">
-            <a:schemeClr val="lt1"/>
-          </a:fontRef>
-        </p:style>
-        <p:txBody>
-          <a:bodyPr rtlCol="0" anchor="ctr"/>
-          <a:lstStyle/>
-          <a:p>
-            <a:pPr algn="ctr"/>
-          </a:p>
-        </p:txBody>
-      </p:sp>
-      <p:sp>
-        <p:nvSpPr>
-          <p:cNvPr id="5" name="TextBox 4"/>
-          <p:cNvSpPr txBox="1"/>
-          <p:nvPr/>
-        </p:nvSpPr>
-        <p:spPr>
-          <a:xfrm>
-            <a:off x="500000" y="110000"/>
-            <a:ext cx="10300000" cy="300000"/>
-          </a:xfrm>
-          <a:prstGeom prst="rect">
-            <a:avLst/>
-          </a:prstGeom>
-          <a:noFill/>
-        </p:spPr>
-        <p:txBody>
-          <a:bodyPr wrap="square" anchor="t" lIns="50800" rIns="50800">
-            <a:spAutoFit/>
-          </a:bodyPr>
-          <a:lstStyle/>
-          <a:p>
-            <a:pPr algn="l"/>
-            <a:r>
-              <a:rPr sz="1200" b="1">
-                <a:solidFill>
-                  <a:srgbClr val="A9C4E6"/>
-                </a:solidFill>
-                <a:latin typeface="Calibri"/>
-              </a:rPr>
-              <a:t>5-REJA</a:t>
-            </a:r>
-          </a:p>
-        </p:txBody>
-      </p:sp>
-      <p:sp>
-        <p:nvSpPr>
-          <p:cNvPr id="6" name="TextBox 5"/>
-          <p:cNvSpPr txBox="1"/>
-          <p:nvPr/>
-        </p:nvSpPr>
-        <p:spPr>
-          <a:xfrm>
-            <a:off x="500000" y="330000"/>
-            <a:ext cx="10400000" cy="650000"/>
-          </a:xfrm>
-          <a:prstGeom prst="rect">
-            <a:avLst/>
-          </a:prstGeom>
-          <a:noFill/>
-        </p:spPr>
-        <p:txBody>
-          <a:bodyPr wrap="square" anchor="ctr" lIns="50800" rIns="50800">
-            <a:spAutoFit/>
-          </a:bodyPr>
-          <a:lstStyle/>
-          <a:p>
-            <a:pPr algn="l"/>
-            <a:r>
-              <a:rPr sz="2600" b="1">
-                <a:solidFill>
-                  <a:srgbClr val="FFFFFF"/>
-                </a:solidFill>
-                <a:latin typeface="Calibri"/>
-              </a:rPr>
-              <a:t>Sun'iy intellekt chiplarini loyihalashning asosiy tamoyillari (2)</a:t>
-            </a:r>
-          </a:p>
-        </p:txBody>
-      </p:sp>
-      <p:sp>
-        <p:nvSpPr>
-          <p:cNvPr id="7" name="Rectangle 6"/>
-          <p:cNvSpPr/>
-          <p:nvPr/>
-        </p:nvSpPr>
-        <p:spPr>
-          <a:xfrm>
-            <a:off x="0" y="1000000"/>
-            <a:ext cx="12192000" cy="45000"/>
-          </a:xfrm>
-          <a:prstGeom prst="rect">
-            <a:avLst/>
-          </a:prstGeom>
-          <a:solidFill>
-            <a:srgbClr val="0F8B8D"/>
-          </a:solidFill>
-          <a:ln>
-            <a:noFill/>
-          </a:ln>
-          <a:effectLst/>
-        </p:spPr>
-        <p:style>
-          <a:lnRef idx="1">
-            <a:schemeClr val="accent1"/>
-          </a:lnRef>
-          <a:fillRef idx="3">
-            <a:schemeClr val="accent1"/>
-          </a:fillRef>
-          <a:effectRef idx="2">
-            <a:schemeClr val="accent1"/>
-          </a:effectRef>
-          <a:fontRef idx="minor">
-            <a:schemeClr val="lt1"/>
-          </a:fontRef>
-        </p:style>
-        <p:txBody>
-          <a:bodyPr rtlCol="0" anchor="ctr"/>
-          <a:lstStyle/>
-          <a:p>
-            <a:pPr algn="ctr"/>
-          </a:p>
-        </p:txBody>
-      </p:sp>
-      <p:sp>
-        <p:nvSpPr>
-          <p:cNvPr id="8" name="TextBox 7"/>
-          <p:cNvSpPr txBox="1"/>
-          <p:nvPr/>
-        </p:nvSpPr>
-        <p:spPr>
-          <a:xfrm>
-            <a:off x="500000" y="6420000"/>
-            <a:ext cx="9500000" cy="300000"/>
-          </a:xfrm>
-          <a:prstGeom prst="rect">
-            <a:avLst/>
-          </a:prstGeom>
-          <a:noFill/>
-        </p:spPr>
-        <p:txBody>
-          <a:bodyPr wrap="square" anchor="t" lIns="50800" rIns="50800">
-            <a:spAutoFit/>
-          </a:bodyPr>
-          <a:lstStyle/>
-          <a:p>
-            <a:pPr algn="l"/>
-            <a:r>
-              <a:rPr sz="1000" b="0">
-                <a:solidFill>
-                  <a:srgbClr val="5B6878"/>
-                </a:solidFill>
-                <a:latin typeface="Calibri"/>
-              </a:rPr>
-              <a:t>M4 · Mashinali o'qitish algoritmlari uchun apparat tezlatkichlari va sun'iy intellekt chiplarini loyihalash</a:t>
-            </a:r>
-          </a:p>
-        </p:txBody>
-      </p:sp>
-      <p:sp>
-        <p:nvSpPr>
-          <p:cNvPr id="9" name="TextBox 8"/>
-          <p:cNvSpPr txBox="1"/>
-          <p:nvPr/>
-        </p:nvSpPr>
-        <p:spPr>
-          <a:xfrm>
-            <a:off x="10600000" y="6420000"/>
-            <a:ext cx="1100000" cy="300000"/>
-          </a:xfrm>
-          <a:prstGeom prst="rect">
-            <a:avLst/>
-          </a:prstGeom>
-          <a:noFill/>
-        </p:spPr>
-        <p:txBody>
-          <a:bodyPr wrap="square" anchor="t" lIns="50800" rIns="50800">
-            <a:spAutoFit/>
-          </a:bodyPr>
-          <a:lstStyle/>
-          <a:p>
-            <a:pPr algn="r"/>
-            <a:r>
-              <a:rPr sz="1000" b="0">
-                <a:solidFill>
-                  <a:srgbClr val="5B6878"/>
-                </a:solidFill>
-                <a:latin typeface="Calibri"/>
-              </a:rPr>
-              <a:t>15</a:t>
-            </a:r>
-          </a:p>
-        </p:txBody>
-      </p:sp>
-      <p:sp>
-        <p:nvSpPr>
-          <p:cNvPr id="10" name="Rounded Rectangle 9"/>
-          <p:cNvSpPr/>
-          <p:nvPr/>
-        </p:nvSpPr>
-        <p:spPr>
-          <a:xfrm>
-            <a:off x="550000" y="2076666"/>
-            <a:ext cx="11100000" cy="1250000"/>
-          </a:xfrm>
-          <a:prstGeom prst="roundRect">
-            <a:avLst>
-              <a:gd name="adj" fmla="val 18000"/>
-            </a:avLst>
-          </a:prstGeom>
-          <a:solidFill>
-            <a:srgbClr val="F5F8FC"/>
-          </a:solidFill>
-          <a:ln>
-            <a:noFill/>
-          </a:ln>
-          <a:effectLst/>
-        </p:spPr>
-        <p:style>
-          <a:lnRef idx="1">
-            <a:schemeClr val="accent1"/>
-          </a:lnRef>
-          <a:fillRef idx="3">
-            <a:schemeClr val="accent1"/>
-          </a:fillRef>
-          <a:effectRef idx="2">
-            <a:schemeClr val="accent1"/>
-          </a:effectRef>
-          <a:fontRef idx="minor">
-            <a:schemeClr val="lt1"/>
-          </a:fontRef>
-        </p:style>
-        <p:txBody>
-          <a:bodyPr rtlCol="0" anchor="ctr"/>
-          <a:lstStyle/>
-          <a:p>
-            <a:pPr algn="ctr"/>
-          </a:p>
-        </p:txBody>
-      </p:sp>
-      <p:sp>
-        <p:nvSpPr>
-          <p:cNvPr id="11" name="Rectangle 10"/>
-          <p:cNvSpPr/>
-          <p:nvPr/>
-        </p:nvSpPr>
-        <p:spPr>
-          <a:xfrm>
-            <a:off x="550000" y="2076666"/>
-            <a:ext cx="70000" cy="1250000"/>
-          </a:xfrm>
-          <a:prstGeom prst="rect">
-            <a:avLst/>
-          </a:prstGeom>
-          <a:solidFill>
-            <a:srgbClr val="2E7D32"/>
-          </a:solidFill>
-          <a:ln>
-            <a:noFill/>
-          </a:ln>
-          <a:effectLst/>
-        </p:spPr>
-        <p:style>
-          <a:lnRef idx="1">
-            <a:schemeClr val="accent1"/>
-          </a:lnRef>
-          <a:fillRef idx="3">
-            <a:schemeClr val="accent1"/>
-          </a:fillRef>
-          <a:effectRef idx="2">
-            <a:schemeClr val="accent1"/>
-          </a:effectRef>
-          <a:fontRef idx="minor">
-            <a:schemeClr val="lt1"/>
-          </a:fontRef>
-        </p:style>
-        <p:txBody>
-          <a:bodyPr rtlCol="0" anchor="ctr"/>
-          <a:lstStyle/>
-          <a:p>
-            <a:pPr algn="ctr"/>
-          </a:p>
-        </p:txBody>
-      </p:sp>
-      <p:sp>
-        <p:nvSpPr>
-          <p:cNvPr id="12" name="Oval 11"/>
-          <p:cNvSpPr/>
-          <p:nvPr/>
-        </p:nvSpPr>
-        <p:spPr>
-          <a:xfrm>
-            <a:off x="800000" y="2471666"/>
-            <a:ext cx="460000" cy="460000"/>
-          </a:xfrm>
-          <a:prstGeom prst="ellipse">
-            <a:avLst/>
-          </a:prstGeom>
-          <a:solidFill>
-            <a:srgbClr val="2E7D32"/>
-          </a:solidFill>
-          <a:ln>
-            <a:noFill/>
-          </a:ln>
-          <a:effectLst/>
-        </p:spPr>
-        <p:style>
-          <a:lnRef idx="1">
-            <a:schemeClr val="accent1"/>
-          </a:lnRef>
-          <a:fillRef idx="3">
-            <a:schemeClr val="accent1"/>
-          </a:fillRef>
-          <a:effectRef idx="2">
-            <a:schemeClr val="accent1"/>
-          </a:effectRef>
-          <a:fontRef idx="minor">
-            <a:schemeClr val="lt1"/>
-          </a:fontRef>
-        </p:style>
-        <p:txBody>
-          <a:bodyPr rtlCol="0" anchor="ctr" lIns="0" rIns="0"/>
-          <a:lstStyle/>
-          <a:p>
-            <a:pPr algn="ctr"/>
-            <a:r>
-              <a:rPr sz="1600" b="1">
-                <a:solidFill>
-                  <a:srgbClr val="FFFFFF"/>
-                </a:solidFill>
-                <a:latin typeface="Calibri"/>
-              </a:rPr>
-              <a:t>6</a:t>
-            </a:r>
-          </a:p>
-        </p:txBody>
-      </p:sp>
-      <p:sp>
-        <p:nvSpPr>
-          <p:cNvPr id="13" name="TextBox 12"/>
-          <p:cNvSpPr txBox="1"/>
-          <p:nvPr/>
-        </p:nvSpPr>
-        <p:spPr>
-          <a:xfrm>
-            <a:off x="1450000" y="2076666"/>
-            <a:ext cx="10050000" cy="1250000"/>
-          </a:xfrm>
-          <a:prstGeom prst="rect">
-            <a:avLst/>
-          </a:prstGeom>
-          <a:noFill/>
-        </p:spPr>
-        <p:txBody>
-          <a:bodyPr wrap="square" anchor="ctr" lIns="50800" rIns="50800">
-            <a:spAutoFit/>
-          </a:bodyPr>
-          <a:lstStyle/>
-          <a:p>
-            <a:pPr algn="l"/>
-            <a:r>
-              <a:rPr sz="2000" b="0">
-                <a:solidFill>
-                  <a:srgbClr val="1B2430"/>
-                </a:solidFill>
-                <a:latin typeface="Calibri"/>
-              </a:rPr>
-              <a:t>5. Masshtablash va interkonnekt. Bitta kristall o'lchami litografiya chegarasi (~858 mm²) bilan cheklangan.</a:t>
-            </a:r>
-          </a:p>
-        </p:txBody>
-      </p:sp>
-      <p:sp>
-        <p:nvSpPr>
-          <p:cNvPr id="14" name="Rounded Rectangle 13"/>
-          <p:cNvSpPr/>
-          <p:nvPr/>
-        </p:nvSpPr>
-        <p:spPr>
-          <a:xfrm>
-            <a:off x="550000" y="3446666"/>
-            <a:ext cx="11100000" cy="1250000"/>
-          </a:xfrm>
-          <a:prstGeom prst="roundRect">
-            <a:avLst>
-              <a:gd name="adj" fmla="val 18000"/>
-            </a:avLst>
-          </a:prstGeom>
-          <a:solidFill>
-            <a:srgbClr val="F5F8FC"/>
-          </a:solidFill>
-          <a:ln>
-            <a:noFill/>
-          </a:ln>
-          <a:effectLst/>
-        </p:spPr>
-        <p:style>
-          <a:lnRef idx="1">
-            <a:schemeClr val="accent1"/>
-          </a:lnRef>
-          <a:fillRef idx="3">
-            <a:schemeClr val="accent1"/>
-          </a:fillRef>
-          <a:effectRef idx="2">
-            <a:schemeClr val="accent1"/>
-          </a:effectRef>
-          <a:fontRef idx="minor">
-            <a:schemeClr val="lt1"/>
-          </a:fontRef>
-        </p:style>
-        <p:txBody>
-          <a:bodyPr rtlCol="0" anchor="ctr"/>
-          <a:lstStyle/>
-          <a:p>
-            <a:pPr algn="ctr"/>
-          </a:p>
-        </p:txBody>
-      </p:sp>
-      <p:sp>
-        <p:nvSpPr>
-          <p:cNvPr id="15" name="Rectangle 14"/>
-          <p:cNvSpPr/>
-          <p:nvPr/>
-        </p:nvSpPr>
-        <p:spPr>
-          <a:xfrm>
-            <a:off x="550000" y="3446666"/>
-            <a:ext cx="70000" cy="1250000"/>
-          </a:xfrm>
-          <a:prstGeom prst="rect">
-            <a:avLst/>
-          </a:prstGeom>
-          <a:solidFill>
-            <a:srgbClr val="2D5C8F"/>
-          </a:solidFill>
-          <a:ln>
-            <a:noFill/>
-          </a:ln>
-          <a:effectLst/>
-        </p:spPr>
-        <p:style>
-          <a:lnRef idx="1">
-            <a:schemeClr val="accent1"/>
-          </a:lnRef>
-          <a:fillRef idx="3">
-            <a:schemeClr val="accent1"/>
-          </a:fillRef>
-          <a:effectRef idx="2">
-            <a:schemeClr val="accent1"/>
-          </a:effectRef>
-          <a:fontRef idx="minor">
-            <a:schemeClr val="lt1"/>
-          </a:fontRef>
-        </p:style>
-        <p:txBody>
-          <a:bodyPr rtlCol="0" anchor="ctr"/>
-          <a:lstStyle/>
-          <a:p>
-            <a:pPr algn="ctr"/>
-          </a:p>
-        </p:txBody>
-      </p:sp>
-      <p:sp>
-        <p:nvSpPr>
-          <p:cNvPr id="16" name="Oval 15"/>
-          <p:cNvSpPr/>
-          <p:nvPr/>
-        </p:nvSpPr>
-        <p:spPr>
-          <a:xfrm>
-            <a:off x="800000" y="3841666"/>
-            <a:ext cx="460000" cy="460000"/>
-          </a:xfrm>
-          <a:prstGeom prst="ellipse">
-            <a:avLst/>
-          </a:prstGeom>
-          <a:solidFill>
-            <a:srgbClr val="2D5C8F"/>
-          </a:solidFill>
-          <a:ln>
-            <a:noFill/>
-          </a:ln>
-          <a:effectLst/>
-        </p:spPr>
-        <p:style>
-          <a:lnRef idx="1">
-            <a:schemeClr val="accent1"/>
-          </a:lnRef>
-          <a:fillRef idx="3">
-            <a:schemeClr val="accent1"/>
-          </a:fillRef>
-          <a:effectRef idx="2">
-            <a:schemeClr val="accent1"/>
-          </a:effectRef>
-          <a:fontRef idx="minor">
-            <a:schemeClr val="lt1"/>
-          </a:fontRef>
-        </p:style>
-        <p:txBody>
-          <a:bodyPr rtlCol="0" anchor="ctr" lIns="0" rIns="0"/>
-          <a:lstStyle/>
-          <a:p>
-            <a:pPr algn="ctr"/>
-            <a:r>
-              <a:rPr sz="1600" b="1">
-                <a:solidFill>
-                  <a:srgbClr val="FFFFFF"/>
-                </a:solidFill>
-                <a:latin typeface="Calibri"/>
-              </a:rPr>
-              <a:t>7</a:t>
-            </a:r>
-          </a:p>
-        </p:txBody>
-      </p:sp>
-      <p:sp>
-        <p:nvSpPr>
-          <p:cNvPr id="17" name="TextBox 16"/>
-          <p:cNvSpPr txBox="1"/>
-          <p:nvPr/>
-        </p:nvSpPr>
-        <p:spPr>
-          <a:xfrm>
-            <a:off x="1450000" y="3446666"/>
-            <a:ext cx="10050000" cy="1250000"/>
-          </a:xfrm>
-          <a:prstGeom prst="rect">
-            <a:avLst/>
-          </a:prstGeom>
-          <a:noFill/>
-        </p:spPr>
-        <p:txBody>
-          <a:bodyPr wrap="square" anchor="ctr" lIns="50800" rIns="50800">
-            <a:spAutoFit/>
-          </a:bodyPr>
-          <a:lstStyle/>
-          <a:p>
-            <a:pPr algn="l"/>
-            <a:r>
-              <a:rPr sz="2000" b="0">
-                <a:solidFill>
-                  <a:srgbClr val="1B2430"/>
-                </a:solidFill>
-                <a:latin typeface="Calibri"/>
-              </a:rPr>
-              <a:t>6. Dasturiy stek bilan birgalikda loyihalash.</a:t>
-            </a:r>
-          </a:p>
-        </p:txBody>
-      </p:sp>
-    </p:spTree>
-  </p:cSld>
-  <p:clrMapOvr>
-    <a:masterClrMapping/>
-  </p:clrMapOvr>
-  <p:transition spd="med">
-    <p:fade/>
-  </p:transition>
-  <p:timing>
-    <p:tnLst>
-      <p:par>
-        <p:cTn id="1" dur="indefinite" restart="never" nodeType="tmRoot">
-          <p:childTnLst>
-            <p:seq concurrent="1" nextAc="seek">
-              <p:cTn id="2" dur="indefinite" nodeType="mainSeq">
-                <p:childTnLst>
-                  <p:par>
-                    <p:cTn id="55" fill="hold">
-                      <p:stCondLst>
-                        <p:cond delay="indefinite"/>
-                        <p:cond evt="onBegin" delay="0">
-                          <p:tn val="2"/>
-                        </p:cond>
-                      </p:stCondLst>
-                      <p:childTnLst>
-                        <p:par>
-                          <p:cTn id="3" fill="hold">
-                            <p:stCondLst>
-                              <p:cond delay="0"/>
-                            </p:stCondLst>
-                            <p:childTnLst>
-                              <p:par>
-                                <p:cTn id="4" presetID="10" presetClass="entr" presetSubtype="0" fill="hold" grpId="0" nodeType="withEffect">
-                                  <p:stCondLst>
-                                    <p:cond delay="0"/>
-                                  </p:stCondLst>
-                                  <p:childTnLst>
-                                    <p:set>
-                                      <p:cBhvr>
-                                        <p:cTn id="5" dur="1" fill="hold">
-                                          <p:stCondLst>
-                                            <p:cond delay="0"/>
-                                          </p:stCondLst>
-                                        </p:cTn>
-                                        <p:tgtEl>
-                                          <p:spTgt spid="6"/>
-                                        </p:tgtEl>
-                                        <p:attrNameLst>
-                                          <p:attrName>style.visibility</p:attrName>
-                                        </p:attrNameLst>
-                                      </p:cBhvr>
-                                      <p:to>
-                                        <p:strVal val="visible"/>
-                                      </p:to>
-                                    </p:set>
-                                    <p:animEffect transition="in" filter="fade">
-                                      <p:cBhvr>
-                                        <p:cTn id="6" dur="550"/>
-                                        <p:tgtEl>
-                                          <p:spTgt spid="6"/>
-                                        </p:tgtEl>
-                                      </p:cBhvr>
-                                    </p:animEffect>
-                                  </p:childTnLst>
-                                </p:cTn>
-                              </p:par>
-                            </p:childTnLst>
-                          </p:cTn>
-                        </p:par>
-                        <p:par>
-                          <p:cTn id="7" fill="hold">
-                            <p:stCondLst>
-                              <p:cond delay="220"/>
-                            </p:stCondLst>
-                            <p:childTnLst>
-                              <p:par>
-                                <p:cTn id="8" presetID="42" presetClass="entr" presetSubtype="0" fill="hold" grpId="0" nodeType="afterEffect">
-                                  <p:stCondLst>
-                                    <p:cond delay="0"/>
-                                  </p:stCondLst>
-                                  <p:childTnLst>
-                                    <p:set>
-                                      <p:cBhvr>
-                                        <p:cTn id="9" dur="1" fill="hold">
-                                          <p:stCondLst>
-                                            <p:cond delay="0"/>
-                                          </p:stCondLst>
-                                        </p:cTn>
-                                        <p:tgtEl>
-                                          <p:spTgt spid="10"/>
-                                        </p:tgtEl>
-                                        <p:attrNameLst>
-                                          <p:attrName>style.visibility</p:attrName>
-                                        </p:attrNameLst>
-                                      </p:cBhvr>
-                                      <p:to>
-                                        <p:strVal val="visible"/>
-                                      </p:to>
-                                    </p:set>
-                                    <p:animEffect transition="in" filter="fade">
-                                      <p:cBhvr>
-                                        <p:cTn id="10" dur="550"/>
-                                        <p:tgtEl>
-                                          <p:spTgt spid="10"/>
-                                        </p:tgtEl>
-                                      </p:cBhvr>
-                                    </p:animEffect>
-                                    <p:anim calcmode="lin" valueType="num">
-                                      <p:cBhvr additive="base">
-                                        <p:cTn id="11" dur="550" fill="hold"/>
-                                        <p:tgtEl>
-                                          <p:spTgt spid="10"/>
-                                        </p:tgtEl>
-                                        <p:attrNameLst>
-                                          <p:attrName>ppt_x</p:attrName>
-                                        </p:attrNameLst>
-                                      </p:cBhvr>
-                                      <p:tavLst>
-                                        <p:tav tm="0">
-                                          <p:val>
-                                            <p:strVal val="#ppt_x"/>
-                                          </p:val>
-                                        </p:tav>
-                                        <p:tav tm="100000">
-                                          <p:val>
-                                            <p:strVal val="#ppt_x"/>
-                                          </p:val>
-                                        </p:tav>
-                                      </p:tavLst>
-                                    </p:anim>
-                                    <p:anim calcmode="lin" valueType="num">
-                                      <p:cBhvr additive="base">
-                                        <p:cTn id="12" dur="550" fill="hold"/>
-                                        <p:tgtEl>
-                                          <p:spTgt spid="10"/>
-                                        </p:tgtEl>
-                                        <p:attrNameLst>
-                                          <p:attrName>ppt_y</p:attrName>
-                                        </p:attrNameLst>
-                                      </p:cBhvr>
-                                      <p:tavLst>
-                                        <p:tav tm="0">
-                                          <p:val>
-                                            <p:strVal val="#ppt_y+.08"/>
-                                          </p:val>
-                                        </p:tav>
-                                        <p:tav tm="100000">
-                                          <p:val>
-                                            <p:strVal val="#ppt_y"/>
-                                          </p:val>
-                                        </p:tav>
-                                      </p:tavLst>
-                                    </p:anim>
-                                  </p:childTnLst>
-                                </p:cTn>
-                              </p:par>
-                            </p:childTnLst>
-                          </p:cTn>
-                        </p:par>
-                        <p:par>
-                          <p:cTn id="13" fill="hold">
-                            <p:stCondLst>
-                              <p:cond delay="220"/>
-                            </p:stCondLst>
-                            <p:childTnLst>
-                              <p:par>
-                                <p:cTn id="14" presetID="42" presetClass="entr" presetSubtype="0" fill="hold" grpId="0" nodeType="afterEffect">
-                                  <p:stCondLst>
-                                    <p:cond delay="0"/>
-                                  </p:stCondLst>
-                                  <p:childTnLst>
-                                    <p:set>
-                                      <p:cBhvr>
-                                        <p:cTn id="15" dur="1" fill="hold">
-                                          <p:stCondLst>
-                                            <p:cond delay="0"/>
-                                          </p:stCondLst>
-                                        </p:cTn>
-                                        <p:tgtEl>
-                                          <p:spTgt spid="11"/>
-                                        </p:tgtEl>
-                                        <p:attrNameLst>
-                                          <p:attrName>style.visibility</p:attrName>
-                                        </p:attrNameLst>
-                                      </p:cBhvr>
-                                      <p:to>
-                                        <p:strVal val="visible"/>
-                                      </p:to>
-                                    </p:set>
-                                    <p:animEffect transition="in" filter="fade">
-                                      <p:cBhvr>
-                                        <p:cTn id="16" dur="550"/>
-                                        <p:tgtEl>
-                                          <p:spTgt spid="11"/>
-                                        </p:tgtEl>
-                                      </p:cBhvr>
-                                    </p:animEffect>
-                                    <p:anim calcmode="lin" valueType="num">
-                                      <p:cBhvr additive="base">
-                                        <p:cTn id="17" dur="550" fill="hold"/>
-                                        <p:tgtEl>
-                                          <p:spTgt spid="11"/>
-                                        </p:tgtEl>
-                                        <p:attrNameLst>
-                                          <p:attrName>ppt_x</p:attrName>
-                                        </p:attrNameLst>
-                                      </p:cBhvr>
-                                      <p:tavLst>
-                                        <p:tav tm="0">
-                                          <p:val>
-                                            <p:strVal val="#ppt_x"/>
-                                          </p:val>
-                                        </p:tav>
-                                        <p:tav tm="100000">
-                                          <p:val>
-                                            <p:strVal val="#ppt_x"/>
-                                          </p:val>
-                                        </p:tav>
-                                      </p:tavLst>
-                                    </p:anim>
-                                    <p:anim calcmode="lin" valueType="num">
-                                      <p:cBhvr additive="base">
-                                        <p:cTn id="18" dur="550" fill="hold"/>
-                                        <p:tgtEl>
-                                          <p:spTgt spid="11"/>
-                                        </p:tgtEl>
-                                        <p:attrNameLst>
-                                          <p:attrName>ppt_y</p:attrName>
-                                        </p:attrNameLst>
-                                      </p:cBhvr>
-                                      <p:tavLst>
-                                        <p:tav tm="0">
-                                          <p:val>
-                                            <p:strVal val="#ppt_y+.08"/>
-                                          </p:val>
-                                        </p:tav>
-                                        <p:tav tm="100000">
-                                          <p:val>
-                                            <p:strVal val="#ppt_y"/>
-                                          </p:val>
-                                        </p:tav>
-                                      </p:tavLst>
-                                    </p:anim>
-                                  </p:childTnLst>
-                                </p:cTn>
-                              </p:par>
-                            </p:childTnLst>
-                          </p:cTn>
-                        </p:par>
-                        <p:par>
-                          <p:cTn id="19" fill="hold">
-                            <p:stCondLst>
-                              <p:cond delay="220"/>
-                            </p:stCondLst>
-                            <p:childTnLst>
-                              <p:par>
-                                <p:cTn id="20" presetID="53" presetClass="entr" presetSubtype="16" fill="hold" grpId="0" nodeType="afterEffect">
-                                  <p:stCondLst>
-                                    <p:cond delay="0"/>
-                                  </p:stCondLst>
-                                  <p:childTnLst>
-                                    <p:set>
-                                      <p:cBhvr>
-                                        <p:cTn id="21" dur="1" fill="hold">
-                                          <p:stCondLst>
-                                            <p:cond delay="0"/>
-                                          </p:stCondLst>
-                                        </p:cTn>
-                                        <p:tgtEl>
-                                          <p:spTgt spid="12"/>
-                                        </p:tgtEl>
-                                        <p:attrNameLst>
-                                          <p:attrName>style.visibility</p:attrName>
-                                        </p:attrNameLst>
-                                      </p:cBhvr>
-                                      <p:to>
-                                        <p:strVal val="visible"/>
-                                      </p:to>
-                                    </p:set>
-                                    <p:animEffect transition="in" filter="fade">
-                                      <p:cBhvr>
-                                        <p:cTn id="22" dur="550"/>
-                                        <p:tgtEl>
-                                          <p:spTgt spid="12"/>
-                                        </p:tgtEl>
-                                      </p:cBhvr>
-                                    </p:animEffect>
-                                    <p:anim calcmode="lin" valueType="num">
-                                      <p:cBhvr additive="base">
-                                        <p:cTn id="23" dur="550" fill="hold"/>
-                                        <p:tgtEl>
-                                          <p:spTgt spid="12"/>
-                                        </p:tgtEl>
-                                        <p:attrNameLst>
-                                          <p:attrName>ppt_w</p:attrName>
-                                        </p:attrNameLst>
-                                      </p:cBhvr>
-                                      <p:tavLst>
-                                        <p:tav tm="0">
-                                          <p:val>
-                                            <p:strVal val="0"/>
-                                          </p:val>
-                                        </p:tav>
-                                        <p:tav tm="100000">
-                                          <p:val>
-                                            <p:strVal val="#ppt_w"/>
-                                          </p:val>
-                                        </p:tav>
-                                      </p:tavLst>
-                                    </p:anim>
-                                    <p:anim calcmode="lin" valueType="num">
-                                      <p:cBhvr additive="base">
-                                        <p:cTn id="24" dur="550" fill="hold"/>
-                                        <p:tgtEl>
-                                          <p:spTgt spid="12"/>
-                                        </p:tgtEl>
-                                        <p:attrNameLst>
-                                          <p:attrName>ppt_h</p:attrName>
-                                        </p:attrNameLst>
-                                      </p:cBhvr>
-                                      <p:tavLst>
-                                        <p:tav tm="0">
-                                          <p:val>
-                                            <p:strVal val="0"/>
-                                          </p:val>
-                                        </p:tav>
-                                        <p:tav tm="100000">
-                                          <p:val>
-                                            <p:strVal val="#ppt_h"/>
-                                          </p:val>
-                                        </p:tav>
-                                      </p:tavLst>
-                                    </p:anim>
-                                  </p:childTnLst>
-                                </p:cTn>
-                              </p:par>
-                            </p:childTnLst>
-                          </p:cTn>
-                        </p:par>
-                        <p:par>
-                          <p:cTn id="25" fill="hold">
-                            <p:stCondLst>
-                              <p:cond delay="220"/>
-                            </p:stCondLst>
-                            <p:childTnLst>
-                              <p:par>
-                                <p:cTn id="26" presetID="42" presetClass="entr" presetSubtype="0" fill="hold" grpId="0" nodeType="afterEffect">
-                                  <p:stCondLst>
-                                    <p:cond delay="0"/>
-                                  </p:stCondLst>
-                                  <p:childTnLst>
-                                    <p:set>
-                                      <p:cBhvr>
-                                        <p:cTn id="27" dur="1" fill="hold">
-                                          <p:stCondLst>
-                                            <p:cond delay="0"/>
-                                          </p:stCondLst>
-                                        </p:cTn>
-                                        <p:tgtEl>
-                                          <p:spTgt spid="13"/>
-                                        </p:tgtEl>
-                                        <p:attrNameLst>
-                                          <p:attrName>style.visibility</p:attrName>
-                                        </p:attrNameLst>
-                                      </p:cBhvr>
-                                      <p:to>
-                                        <p:strVal val="visible"/>
-                                      </p:to>
-                                    </p:set>
-                                    <p:animEffect transition="in" filter="fade">
-                                      <p:cBhvr>
-                                        <p:cTn id="28" dur="550"/>
-                                        <p:tgtEl>
-                                          <p:spTgt spid="13"/>
-                                        </p:tgtEl>
-                                      </p:cBhvr>
-                                    </p:animEffect>
-                                    <p:anim calcmode="lin" valueType="num">
-                                      <p:cBhvr additive="base">
-                                        <p:cTn id="29" dur="550" fill="hold"/>
-                                        <p:tgtEl>
-                                          <p:spTgt spid="13"/>
-                                        </p:tgtEl>
-                                        <p:attrNameLst>
-                                          <p:attrName>ppt_x</p:attrName>
-                                        </p:attrNameLst>
-                                      </p:cBhvr>
-                                      <p:tavLst>
-                                        <p:tav tm="0">
-                                          <p:val>
-                                            <p:strVal val="#ppt_x"/>
-                                          </p:val>
-                                        </p:tav>
-                                        <p:tav tm="100000">
-                                          <p:val>
-                                            <p:strVal val="#ppt_x"/>
-                                          </p:val>
-                                        </p:tav>
-                                      </p:tavLst>
-                                    </p:anim>
-                                    <p:anim calcmode="lin" valueType="num">
-                                      <p:cBhvr additive="base">
-                                        <p:cTn id="30" dur="550" fill="hold"/>
-                                        <p:tgtEl>
-                                          <p:spTgt spid="13"/>
-                                        </p:tgtEl>
-                                        <p:attrNameLst>
-                                          <p:attrName>ppt_y</p:attrName>
-                                        </p:attrNameLst>
-                                      </p:cBhvr>
-                                      <p:tavLst>
-                                        <p:tav tm="0">
-                                          <p:val>
-                                            <p:strVal val="#ppt_y+.08"/>
-                                          </p:val>
-                                        </p:tav>
-                                        <p:tav tm="100000">
-                                          <p:val>
-                                            <p:strVal val="#ppt_y"/>
-                                          </p:val>
-                                        </p:tav>
-                                      </p:tavLst>
-                                    </p:anim>
-                                  </p:childTnLst>
-                                </p:cTn>
-                              </p:par>
-                            </p:childTnLst>
-                          </p:cTn>
-                        </p:par>
-                        <p:par>
-                          <p:cTn id="31" fill="hold">
-                            <p:stCondLst>
-                              <p:cond delay="440"/>
-                            </p:stCondLst>
-                            <p:childTnLst>
-                              <p:par>
-                                <p:cTn id="32" presetID="42" presetClass="entr" presetSubtype="0" fill="hold" grpId="0" nodeType="afterEffect">
-                                  <p:stCondLst>
-                                    <p:cond delay="0"/>
-                                  </p:stCondLst>
-                                  <p:childTnLst>
-                                    <p:set>
-                                      <p:cBhvr>
-                                        <p:cTn id="33" dur="1" fill="hold">
-                                          <p:stCondLst>
-                                            <p:cond delay="0"/>
-                                          </p:stCondLst>
-                                        </p:cTn>
-                                        <p:tgtEl>
-                                          <p:spTgt spid="14"/>
-                                        </p:tgtEl>
-                                        <p:attrNameLst>
-                                          <p:attrName>style.visibility</p:attrName>
-                                        </p:attrNameLst>
-                                      </p:cBhvr>
-                                      <p:to>
-                                        <p:strVal val="visible"/>
-                                      </p:to>
-                                    </p:set>
-                                    <p:animEffect transition="in" filter="fade">
-                                      <p:cBhvr>
-                                        <p:cTn id="34" dur="550"/>
-                                        <p:tgtEl>
-                                          <p:spTgt spid="14"/>
-                                        </p:tgtEl>
-                                      </p:cBhvr>
-                                    </p:animEffect>
-                                    <p:anim calcmode="lin" valueType="num">
-                                      <p:cBhvr additive="base">
-                                        <p:cTn id="35" dur="550" fill="hold"/>
-                                        <p:tgtEl>
-                                          <p:spTgt spid="14"/>
-                                        </p:tgtEl>
-                                        <p:attrNameLst>
-                                          <p:attrName>ppt_x</p:attrName>
-                                        </p:attrNameLst>
-                                      </p:cBhvr>
-                                      <p:tavLst>
-                                        <p:tav tm="0">
-                                          <p:val>
-                                            <p:strVal val="#ppt_x"/>
-                                          </p:val>
-                                        </p:tav>
-                                        <p:tav tm="100000">
-                                          <p:val>
-                                            <p:strVal val="#ppt_x"/>
-                                          </p:val>
-                                        </p:tav>
-                                      </p:tavLst>
-                                    </p:anim>
-                                    <p:anim calcmode="lin" valueType="num">
-                                      <p:cBhvr additive="base">
-                                        <p:cTn id="36" dur="550" fill="hold"/>
-                                        <p:tgtEl>
-                                          <p:spTgt spid="14"/>
-                                        </p:tgtEl>
-                                        <p:attrNameLst>
-                                          <p:attrName>ppt_y</p:attrName>
-                                        </p:attrNameLst>
-                                      </p:cBhvr>
-                                      <p:tavLst>
-                                        <p:tav tm="0">
-                                          <p:val>
-                                            <p:strVal val="#ppt_y+.08"/>
-                                          </p:val>
-                                        </p:tav>
-                                        <p:tav tm="100000">
-                                          <p:val>
-                                            <p:strVal val="#ppt_y"/>
-                                          </p:val>
-                                        </p:tav>
-                                      </p:tavLst>
-                                    </p:anim>
-                                  </p:childTnLst>
-                                </p:cTn>
-                              </p:par>
-                            </p:childTnLst>
-                          </p:cTn>
-                        </p:par>
-                        <p:par>
-                          <p:cTn id="37" fill="hold">
-                            <p:stCondLst>
-                              <p:cond delay="440"/>
-                            </p:stCondLst>
-                            <p:childTnLst>
-                              <p:par>
-                                <p:cTn id="38" presetID="42" presetClass="entr" presetSubtype="0" fill="hold" grpId="0" nodeType="afterEffect">
-                                  <p:stCondLst>
-                                    <p:cond delay="0"/>
-                                  </p:stCondLst>
-                                  <p:childTnLst>
-                                    <p:set>
-                                      <p:cBhvr>
-                                        <p:cTn id="39" dur="1" fill="hold">
-                                          <p:stCondLst>
-                                            <p:cond delay="0"/>
-                                          </p:stCondLst>
-                                        </p:cTn>
-                                        <p:tgtEl>
-                                          <p:spTgt spid="15"/>
-                                        </p:tgtEl>
-                                        <p:attrNameLst>
-                                          <p:attrName>style.visibility</p:attrName>
-                                        </p:attrNameLst>
-                                      </p:cBhvr>
-                                      <p:to>
-                                        <p:strVal val="visible"/>
-                                      </p:to>
-                                    </p:set>
-                                    <p:animEffect transition="in" filter="fade">
-                                      <p:cBhvr>
-                                        <p:cTn id="40" dur="550"/>
-                                        <p:tgtEl>
-                                          <p:spTgt spid="15"/>
-                                        </p:tgtEl>
-                                      </p:cBhvr>
-                                    </p:animEffect>
-                                    <p:anim calcmode="lin" valueType="num">
-                                      <p:cBhvr additive="base">
-                                        <p:cTn id="41" dur="550" fill="hold"/>
-                                        <p:tgtEl>
-                                          <p:spTgt spid="15"/>
-                                        </p:tgtEl>
-                                        <p:attrNameLst>
-                                          <p:attrName>ppt_x</p:attrName>
-                                        </p:attrNameLst>
-                                      </p:cBhvr>
-                                      <p:tavLst>
-                                        <p:tav tm="0">
-                                          <p:val>
-                                            <p:strVal val="#ppt_x"/>
-                                          </p:val>
-                                        </p:tav>
-                                        <p:tav tm="100000">
-                                          <p:val>
-                                            <p:strVal val="#ppt_x"/>
-                                          </p:val>
-                                        </p:tav>
-                                      </p:tavLst>
-                                    </p:anim>
-                                    <p:anim calcmode="lin" valueType="num">
-                                      <p:cBhvr additive="base">
-                                        <p:cTn id="42" dur="550" fill="hold"/>
-                                        <p:tgtEl>
-                                          <p:spTgt spid="15"/>
-                                        </p:tgtEl>
-                                        <p:attrNameLst>
-                                          <p:attrName>ppt_y</p:attrName>
-                                        </p:attrNameLst>
-                                      </p:cBhvr>
-                                      <p:tavLst>
-                                        <p:tav tm="0">
-                                          <p:val>
-                                            <p:strVal val="#ppt_y+.08"/>
-                                          </p:val>
-                                        </p:tav>
-                                        <p:tav tm="100000">
-                                          <p:val>
-                                            <p:strVal val="#ppt_y"/>
-                                          </p:val>
-                                        </p:tav>
-                                      </p:tavLst>
-                                    </p:anim>
-                                  </p:childTnLst>
-                                </p:cTn>
-                              </p:par>
-                            </p:childTnLst>
-                          </p:cTn>
-                        </p:par>
-                        <p:par>
-                          <p:cTn id="43" fill="hold">
-                            <p:stCondLst>
-                              <p:cond delay="440"/>
-                            </p:stCondLst>
-                            <p:childTnLst>
-                              <p:par>
-                                <p:cTn id="44" presetID="53" presetClass="entr" presetSubtype="16" fill="hold" grpId="0" nodeType="afterEffect">
-                                  <p:stCondLst>
-                                    <p:cond delay="0"/>
-                                  </p:stCondLst>
-                                  <p:childTnLst>
-                                    <p:set>
-                                      <p:cBhvr>
-                                        <p:cTn id="45" dur="1" fill="hold">
-                                          <p:stCondLst>
-                                            <p:cond delay="0"/>
-                                          </p:stCondLst>
-                                        </p:cTn>
-                                        <p:tgtEl>
-                                          <p:spTgt spid="16"/>
-                                        </p:tgtEl>
-                                        <p:attrNameLst>
-                                          <p:attrName>style.visibility</p:attrName>
-                                        </p:attrNameLst>
-                                      </p:cBhvr>
-                                      <p:to>
-                                        <p:strVal val="visible"/>
-                                      </p:to>
-                                    </p:set>
-                                    <p:animEffect transition="in" filter="fade">
-                                      <p:cBhvr>
-                                        <p:cTn id="46" dur="550"/>
-                                        <p:tgtEl>
-                                          <p:spTgt spid="16"/>
-                                        </p:tgtEl>
-                                      </p:cBhvr>
-                                    </p:animEffect>
-                                    <p:anim calcmode="lin" valueType="num">
-                                      <p:cBhvr additive="base">
-                                        <p:cTn id="47" dur="550" fill="hold"/>
-                                        <p:tgtEl>
-                                          <p:spTgt spid="16"/>
-                                        </p:tgtEl>
-                                        <p:attrNameLst>
-                                          <p:attrName>ppt_w</p:attrName>
-                                        </p:attrNameLst>
-                                      </p:cBhvr>
-                                      <p:tavLst>
-                                        <p:tav tm="0">
-                                          <p:val>
-                                            <p:strVal val="0"/>
-                                          </p:val>
-                                        </p:tav>
-                                        <p:tav tm="100000">
-                                          <p:val>
-                                            <p:strVal val="#ppt_w"/>
-                                          </p:val>
-                                        </p:tav>
-                                      </p:tavLst>
-                                    </p:anim>
-                                    <p:anim calcmode="lin" valueType="num">
-                                      <p:cBhvr additive="base">
-                                        <p:cTn id="48" dur="550" fill="hold"/>
-                                        <p:tgtEl>
-                                          <p:spTgt spid="16"/>
-                                        </p:tgtEl>
-                                        <p:attrNameLst>
-                                          <p:attrName>ppt_h</p:attrName>
-                                        </p:attrNameLst>
-                                      </p:cBhvr>
-                                      <p:tavLst>
-                                        <p:tav tm="0">
-                                          <p:val>
-                                            <p:strVal val="0"/>
-                                          </p:val>
-                                        </p:tav>
-                                        <p:tav tm="100000">
-                                          <p:val>
-                                            <p:strVal val="#ppt_h"/>
-                                          </p:val>
-                                        </p:tav>
-                                      </p:tavLst>
-                                    </p:anim>
-                                  </p:childTnLst>
-                                </p:cTn>
-                              </p:par>
-                            </p:childTnLst>
-                          </p:cTn>
-                        </p:par>
-                        <p:par>
-                          <p:cTn id="49" fill="hold">
-                            <p:stCondLst>
-                              <p:cond delay="440"/>
-                            </p:stCondLst>
-                            <p:childTnLst>
-                              <p:par>
-                                <p:cTn id="50" presetID="42" presetClass="entr" presetSubtype="0" fill="hold" grpId="0" nodeType="afterEffect">
-                                  <p:stCondLst>
-                                    <p:cond delay="0"/>
-                                  </p:stCondLst>
-                                  <p:childTnLst>
-                                    <p:set>
-                                      <p:cBhvr>
-                                        <p:cTn id="51" dur="1" fill="hold">
-                                          <p:stCondLst>
-                                            <p:cond delay="0"/>
-                                          </p:stCondLst>
-                                        </p:cTn>
-                                        <p:tgtEl>
-                                          <p:spTgt spid="17"/>
-                                        </p:tgtEl>
-                                        <p:attrNameLst>
-                                          <p:attrName>style.visibility</p:attrName>
-                                        </p:attrNameLst>
-                                      </p:cBhvr>
-                                      <p:to>
-                                        <p:strVal val="visible"/>
-                                      </p:to>
-                                    </p:set>
-                                    <p:animEffect transition="in" filter="fade">
-                                      <p:cBhvr>
-                                        <p:cTn id="52" dur="550"/>
-                                        <p:tgtEl>
-                                          <p:spTgt spid="17"/>
-                                        </p:tgtEl>
-                                      </p:cBhvr>
-                                    </p:animEffect>
-                                    <p:anim calcmode="lin" valueType="num">
-                                      <p:cBhvr additive="base">
-                                        <p:cTn id="53" dur="550" fill="hold"/>
-                                        <p:tgtEl>
-                                          <p:spTgt spid="17"/>
-                                        </p:tgtEl>
-                                        <p:attrNameLst>
-                                          <p:attrName>ppt_x</p:attrName>
-                                        </p:attrNameLst>
-                                      </p:cBhvr>
-                                      <p:tavLst>
-                                        <p:tav tm="0">
-                                          <p:val>
-                                            <p:strVal val="#ppt_x"/>
-                                          </p:val>
-                                        </p:tav>
-                                        <p:tav tm="100000">
-                                          <p:val>
-                                            <p:strVal val="#ppt_x"/>
-                                          </p:val>
-                                        </p:tav>
-                                      </p:tavLst>
-                                    </p:anim>
-                                    <p:anim calcmode="lin" valueType="num">
-                                      <p:cBhvr additive="base">
-                                        <p:cTn id="54" dur="550" fill="hold"/>
-                                        <p:tgtEl>
-                                          <p:spTgt spid="17"/>
-                                        </p:tgtEl>
-                                        <p:attrNameLst>
-                                          <p:attrName>ppt_y</p:attrName>
-                                        </p:attrNameLst>
-                                      </p:cBhvr>
-                                      <p:tavLst>
-                                        <p:tav tm="0">
-                                          <p:val>
-                                            <p:strVal val="#ppt_y+.08"/>
-                                          </p:val>
-                                        </p:tav>
-                                        <p:tav tm="100000">
-                                          <p:val>
-                                            <p:strVal val="#ppt_y"/>
-                                          </p:val>
-                                        </p:tav>
-                                      </p:tavLst>
-                                    </p:anim>
-                                  </p:childTnLst>
-                                </p:cTn>
-                              </p:par>
-                            </p:childTnLst>
-                          </p:cTn>
-                        </p:par>
-                      </p:childTnLst>
-                    </p:cTn>
-                  </p:par>
-                </p:childTnLst>
-              </p:cTn>
-              <p:prevCondLst>
-                <p:cond evt="onPrev" delay="0">
-                  <p:tgtEl>
-                    <p:sldTgt/>
-                  </p:tgtEl>
-                </p:cond>
-              </p:prevCondLst>
-              <p:nextCondLst>
-                <p:cond evt="onNext" delay="0">
-                  <p:tgtEl>
-                    <p:sldTgt/>
-                  </p:tgtEl>
-                </p:cond>
-              </p:nextCondLst>
-            </p:seq>
-          </p:childTnLst>
-        </p:cTn>
-      </p:par>
-    </p:tnLst>
-    <p:bldLst>
-      <p:bldP spid="6" grpId="0" animBg="1"/>
-      <p:bldP spid="10" grpId="0" animBg="1"/>
-      <p:bldP spid="11" grpId="0" animBg="1"/>
-      <p:bldP spid="12" grpId="0" animBg="1"/>
-      <p:bldP spid="13" grpId="0" animBg="1"/>
-      <p:bldP spid="14" grpId="0" animBg="1"/>
-      <p:bldP spid="15" grpId="0" animBg="1"/>
-      <p:bldP spid="16" grpId="0" animBg="1"/>
-      <p:bldP spid="17" grpId="0" animBg="1"/>
-    </p:bldLst>
-  </p:timing>
-</p:sld>
-</file>
-
-<file path=ppt/slides/slide16.xml><?xml version="1.0" encoding="utf-8"?>
 <p:sld xmlns:a="http://schemas.openxmlformats.org/drawingml/2006/main" xmlns:p="http://schemas.openxmlformats.org/presentationml/2006/main" xmlns:r="http://schemas.openxmlformats.org/officeDocument/2006/relationships">
   <p:cSld>
     <p:spTree>
@@ -16287,7 +12522,7 @@
 </p:sld>
 </file>
 
-<file path=ppt/slides/slide17.xml><?xml version="1.0" encoding="utf-8"?>
+<file path=ppt/slides/slide16.xml><?xml version="1.0" encoding="utf-8"?>
 <p:sld xmlns:a="http://schemas.openxmlformats.org/drawingml/2006/main" xmlns:p="http://schemas.openxmlformats.org/presentationml/2006/main" xmlns:r="http://schemas.openxmlformats.org/officeDocument/2006/relationships">
   <p:cSld>
     <p:spTree>
@@ -16616,7 +12851,7 @@
                 </a:solidFill>
                 <a:latin typeface="Calibri"/>
               </a:rPr>
-              <a:t>17</a:t>
+              <a:t>16</a:t>
             </a:r>
           </a:p>
         </p:txBody>
@@ -16629,8 +12864,8 @@
         </p:nvSpPr>
         <p:spPr>
           <a:xfrm>
-            <a:off x="550000" y="2533333"/>
-            <a:ext cx="11100000" cy="1250000"/>
+            <a:off x="550000" y="3515000"/>
+            <a:ext cx="11100000" cy="520000"/>
           </a:xfrm>
           <a:prstGeom prst="roundRect">
             <a:avLst>
@@ -16675,8 +12910,8 @@
         </p:nvSpPr>
         <p:spPr>
           <a:xfrm>
-            <a:off x="550000" y="2533333"/>
-            <a:ext cx="70000" cy="1250000"/>
+            <a:off x="550000" y="3515000"/>
+            <a:ext cx="70000" cy="520000"/>
           </a:xfrm>
           <a:prstGeom prst="rect">
             <a:avLst/>
@@ -16719,8 +12954,8 @@
         </p:nvSpPr>
         <p:spPr>
           <a:xfrm>
-            <a:off x="800000" y="2928333"/>
-            <a:ext cx="460000" cy="460000"/>
+            <a:off x="780000" y="3585000"/>
+            <a:ext cx="380000" cy="380000"/>
           </a:xfrm>
           <a:prstGeom prst="ellipse">
             <a:avLst/>
@@ -16753,7 +12988,7 @@
           <a:p>
             <a:pPr algn="ctr"/>
             <a:r>
-              <a:rPr sz="1600" b="1">
+              <a:rPr sz="1400" b="1">
                 <a:solidFill>
                   <a:srgbClr val="FFFFFF"/>
                 </a:solidFill>
@@ -16772,8 +13007,8 @@
         </p:nvSpPr>
         <p:spPr>
           <a:xfrm>
-            <a:off x="1450000" y="2533333"/>
-            <a:ext cx="10050000" cy="1250000"/>
+            <a:off x="1380000" y="3555000"/>
+            <a:ext cx="10150000" cy="440000"/>
           </a:xfrm>
           <a:prstGeom prst="rect">
             <a:avLst/>
@@ -16781,12 +13016,11 @@
           <a:noFill/>
         </p:spPr>
         <p:txBody>
-          <a:bodyPr wrap="square" anchor="ctr" lIns="50800" rIns="50800">
+          <a:bodyPr wrap="square" anchor="ctr">
             <a:spAutoFit/>
           </a:bodyPr>
           <a:lstStyle/>
           <a:p>
-            <a:pPr algn="l"/>
             <a:r>
               <a:rPr sz="1600" b="0">
                 <a:solidFill>
@@ -16794,7 +13028,7 @@
                 </a:solidFill>
                 <a:latin typeface="Calibri"/>
               </a:rPr>
-              <a:t>Birinchi tendensiya — transformer uchun ixtisoslashuv: FP8/FP4 formatlar, Transformer Engine, diqqat mexanizmi uchun maxsus yadrolar (FlashAttention apparat bilan birgalikda), katta KV-kesh uchun xotira sig'imi (B200 192 GB, MI300X 192 GB, MI325X 256 GB).…</a:t>
+              <a:t>Birinchi tendensiya — transformer uchun ixtisoslashuv: FP8/FP4 formatlar, Transformer Engine, diqqat mexanizmi uchun maxsus yadrolar (FlashAttention apparat bilan birgalikda), katta KV-kesh uchun xotira sig'imi (B200 192 GB, MI300X 192 GB, MI325X 256 GB).</a:t>
             </a:r>
           </a:p>
         </p:txBody>
@@ -17263,7 +13497,7 @@
 </p:sld>
 </file>
 
-<file path=ppt/slides/slide18.xml><?xml version="1.0" encoding="utf-8"?>
+<file path=ppt/slides/slide17.xml><?xml version="1.0" encoding="utf-8"?>
 <p:sld xmlns:a="http://schemas.openxmlformats.org/drawingml/2006/main" xmlns:p="http://schemas.openxmlformats.org/presentationml/2006/main" xmlns:r="http://schemas.openxmlformats.org/officeDocument/2006/relationships">
   <p:cSld>
     <p:spTree>
@@ -18189,8 +14423,8 @@
         </p:nvSpPr>
         <p:spPr>
           <a:xfrm>
-            <a:off x="550000" y="1300000"/>
-            <a:ext cx="11100000" cy="725000"/>
+            <a:off x="550000" y="1940000"/>
+            <a:ext cx="11100000" cy="520000"/>
           </a:xfrm>
           <a:prstGeom prst="roundRect">
             <a:avLst>
@@ -18235,8 +14469,8 @@
         </p:nvSpPr>
         <p:spPr>
           <a:xfrm>
-            <a:off x="550000" y="1300000"/>
-            <a:ext cx="70000" cy="725000"/>
+            <a:off x="550000" y="1940000"/>
+            <a:ext cx="70000" cy="520000"/>
           </a:xfrm>
           <a:prstGeom prst="rect">
             <a:avLst/>
@@ -18279,8 +14513,8 @@
         </p:nvSpPr>
         <p:spPr>
           <a:xfrm>
-            <a:off x="800000" y="1432500"/>
-            <a:ext cx="460000" cy="460000"/>
+            <a:off x="780000" y="2010000"/>
+            <a:ext cx="380000" cy="380000"/>
           </a:xfrm>
           <a:prstGeom prst="ellipse">
             <a:avLst/>
@@ -18313,7 +14547,7 @@
           <a:p>
             <a:pPr algn="ctr"/>
             <a:r>
-              <a:rPr sz="1600" b="1">
+              <a:rPr sz="1400" b="1">
                 <a:solidFill>
                   <a:srgbClr val="FFFFFF"/>
                 </a:solidFill>
@@ -18332,8 +14566,8 @@
         </p:nvSpPr>
         <p:spPr>
           <a:xfrm>
-            <a:off x="1450000" y="1300000"/>
-            <a:ext cx="10050000" cy="725000"/>
+            <a:off x="1380000" y="1980000"/>
+            <a:ext cx="10150000" cy="440000"/>
           </a:xfrm>
           <a:prstGeom prst="rect">
             <a:avLst/>
@@ -18341,14 +14575,13 @@
           <a:noFill/>
         </p:spPr>
         <p:txBody>
-          <a:bodyPr wrap="square" anchor="ctr" lIns="50800" rIns="50800">
+          <a:bodyPr wrap="square" anchor="ctr">
             <a:spAutoFit/>
           </a:bodyPr>
           <a:lstStyle/>
           <a:p>
-            <a:pPr algn="l"/>
             <a:r>
-              <a:rPr sz="1900" b="0">
+              <a:rPr sz="1600" b="0">
                 <a:solidFill>
                   <a:srgbClr val="1B2430"/>
                 </a:solidFill>
@@ -18367,8 +14600,8 @@
         </p:nvSpPr>
         <p:spPr>
           <a:xfrm>
-            <a:off x="550000" y="2145000"/>
-            <a:ext cx="11100000" cy="725000"/>
+            <a:off x="550000" y="2570000"/>
+            <a:ext cx="11100000" cy="520000"/>
           </a:xfrm>
           <a:prstGeom prst="roundRect">
             <a:avLst>
@@ -18413,8 +14646,8 @@
         </p:nvSpPr>
         <p:spPr>
           <a:xfrm>
-            <a:off x="550000" y="2145000"/>
-            <a:ext cx="70000" cy="725000"/>
+            <a:off x="550000" y="2570000"/>
+            <a:ext cx="70000" cy="520000"/>
           </a:xfrm>
           <a:prstGeom prst="rect">
             <a:avLst/>
@@ -18457,8 +14690,8 @@
         </p:nvSpPr>
         <p:spPr>
           <a:xfrm>
-            <a:off x="800000" y="2277500"/>
-            <a:ext cx="460000" cy="460000"/>
+            <a:off x="780000" y="2640000"/>
+            <a:ext cx="380000" cy="380000"/>
           </a:xfrm>
           <a:prstGeom prst="ellipse">
             <a:avLst/>
@@ -18491,7 +14724,7 @@
           <a:p>
             <a:pPr algn="ctr"/>
             <a:r>
-              <a:rPr sz="1600" b="1">
+              <a:rPr sz="1400" b="1">
                 <a:solidFill>
                   <a:srgbClr val="FFFFFF"/>
                 </a:solidFill>
@@ -18510,8 +14743,8 @@
         </p:nvSpPr>
         <p:spPr>
           <a:xfrm>
-            <a:off x="1450000" y="2145000"/>
-            <a:ext cx="10050000" cy="725000"/>
+            <a:off x="1380000" y="2610000"/>
+            <a:ext cx="10150000" cy="440000"/>
           </a:xfrm>
           <a:prstGeom prst="rect">
             <a:avLst/>
@@ -18519,14 +14752,13 @@
           <a:noFill/>
         </p:spPr>
         <p:txBody>
-          <a:bodyPr wrap="square" anchor="ctr" lIns="50800" rIns="50800">
+          <a:bodyPr wrap="square" anchor="ctr">
             <a:spAutoFit/>
           </a:bodyPr>
           <a:lstStyle/>
           <a:p>
-            <a:pPr algn="l"/>
             <a:r>
-              <a:rPr sz="1900" b="0">
+              <a:rPr sz="1600" b="0">
                 <a:solidFill>
                   <a:srgbClr val="1B2430"/>
                 </a:solidFill>
@@ -18545,8 +14777,8 @@
         </p:nvSpPr>
         <p:spPr>
           <a:xfrm>
-            <a:off x="550000" y="2990000"/>
-            <a:ext cx="11100000" cy="725000"/>
+            <a:off x="550000" y="3200000"/>
+            <a:ext cx="11100000" cy="520000"/>
           </a:xfrm>
           <a:prstGeom prst="roundRect">
             <a:avLst>
@@ -18591,8 +14823,8 @@
         </p:nvSpPr>
         <p:spPr>
           <a:xfrm>
-            <a:off x="550000" y="2990000"/>
-            <a:ext cx="70000" cy="725000"/>
+            <a:off x="550000" y="3200000"/>
+            <a:ext cx="70000" cy="520000"/>
           </a:xfrm>
           <a:prstGeom prst="rect">
             <a:avLst/>
@@ -18635,8 +14867,8 @@
         </p:nvSpPr>
         <p:spPr>
           <a:xfrm>
-            <a:off x="800000" y="3122500"/>
-            <a:ext cx="460000" cy="460000"/>
+            <a:off x="780000" y="3270000"/>
+            <a:ext cx="380000" cy="380000"/>
           </a:xfrm>
           <a:prstGeom prst="ellipse">
             <a:avLst/>
@@ -18669,7 +14901,7 @@
           <a:p>
             <a:pPr algn="ctr"/>
             <a:r>
-              <a:rPr sz="1600" b="1">
+              <a:rPr sz="1400" b="1">
                 <a:solidFill>
                   <a:srgbClr val="FFFFFF"/>
                 </a:solidFill>
@@ -18688,8 +14920,8 @@
         </p:nvSpPr>
         <p:spPr>
           <a:xfrm>
-            <a:off x="1450000" y="2990000"/>
-            <a:ext cx="10050000" cy="725000"/>
+            <a:off x="1380000" y="3240000"/>
+            <a:ext cx="10150000" cy="440000"/>
           </a:xfrm>
           <a:prstGeom prst="rect">
             <a:avLst/>
@@ -18697,14 +14929,13 @@
           <a:noFill/>
         </p:spPr>
         <p:txBody>
-          <a:bodyPr wrap="square" anchor="ctr" lIns="50800" rIns="50800">
+          <a:bodyPr wrap="square" anchor="ctr">
             <a:spAutoFit/>
           </a:bodyPr>
           <a:lstStyle/>
           <a:p>
-            <a:pPr algn="l"/>
             <a:r>
-              <a:rPr sz="1900" b="0">
+              <a:rPr sz="1600" b="0">
                 <a:solidFill>
                   <a:srgbClr val="1B2430"/>
                 </a:solidFill>
@@ -18723,8 +14954,8 @@
         </p:nvSpPr>
         <p:spPr>
           <a:xfrm>
-            <a:off x="550000" y="3835000"/>
-            <a:ext cx="11100000" cy="725000"/>
+            <a:off x="550000" y="3830000"/>
+            <a:ext cx="11100000" cy="520000"/>
           </a:xfrm>
           <a:prstGeom prst="roundRect">
             <a:avLst>
@@ -18769,8 +15000,8 @@
         </p:nvSpPr>
         <p:spPr>
           <a:xfrm>
-            <a:off x="550000" y="3835000"/>
-            <a:ext cx="70000" cy="725000"/>
+            <a:off x="550000" y="3830000"/>
+            <a:ext cx="70000" cy="520000"/>
           </a:xfrm>
           <a:prstGeom prst="rect">
             <a:avLst/>
@@ -18813,8 +15044,8 @@
         </p:nvSpPr>
         <p:spPr>
           <a:xfrm>
-            <a:off x="800000" y="3967500"/>
-            <a:ext cx="460000" cy="460000"/>
+            <a:off x="780000" y="3900000"/>
+            <a:ext cx="380000" cy="380000"/>
           </a:xfrm>
           <a:prstGeom prst="ellipse">
             <a:avLst/>
@@ -18847,7 +15078,7 @@
           <a:p>
             <a:pPr algn="ctr"/>
             <a:r>
-              <a:rPr sz="1600" b="1">
+              <a:rPr sz="1400" b="1">
                 <a:solidFill>
                   <a:srgbClr val="FFFFFF"/>
                 </a:solidFill>
@@ -18866,8 +15097,8 @@
         </p:nvSpPr>
         <p:spPr>
           <a:xfrm>
-            <a:off x="1450000" y="3835000"/>
-            <a:ext cx="10050000" cy="725000"/>
+            <a:off x="1380000" y="3870000"/>
+            <a:ext cx="10150000" cy="440000"/>
           </a:xfrm>
           <a:prstGeom prst="rect">
             <a:avLst/>
@@ -18875,14 +15106,13 @@
           <a:noFill/>
         </p:spPr>
         <p:txBody>
-          <a:bodyPr wrap="square" anchor="ctr" lIns="50800" rIns="50800">
+          <a:bodyPr wrap="square" anchor="ctr">
             <a:spAutoFit/>
           </a:bodyPr>
           <a:lstStyle/>
           <a:p>
-            <a:pPr algn="l"/>
             <a:r>
-              <a:rPr sz="1900" b="0">
+              <a:rPr sz="1600" b="0">
                 <a:solidFill>
                   <a:srgbClr val="1B2430"/>
                 </a:solidFill>
@@ -18901,8 +15131,8 @@
         </p:nvSpPr>
         <p:spPr>
           <a:xfrm>
-            <a:off x="550000" y="4680000"/>
-            <a:ext cx="11100000" cy="725000"/>
+            <a:off x="550000" y="4460000"/>
+            <a:ext cx="11100000" cy="520000"/>
           </a:xfrm>
           <a:prstGeom prst="roundRect">
             <a:avLst>
@@ -18947,8 +15177,8 @@
         </p:nvSpPr>
         <p:spPr>
           <a:xfrm>
-            <a:off x="550000" y="4680000"/>
-            <a:ext cx="70000" cy="725000"/>
+            <a:off x="550000" y="4460000"/>
+            <a:ext cx="70000" cy="520000"/>
           </a:xfrm>
           <a:prstGeom prst="rect">
             <a:avLst/>
@@ -18991,8 +15221,8 @@
         </p:nvSpPr>
         <p:spPr>
           <a:xfrm>
-            <a:off x="800000" y="4812500"/>
-            <a:ext cx="460000" cy="460000"/>
+            <a:off x="780000" y="4530000"/>
+            <a:ext cx="380000" cy="380000"/>
           </a:xfrm>
           <a:prstGeom prst="ellipse">
             <a:avLst/>
@@ -19025,7 +15255,7 @@
           <a:p>
             <a:pPr algn="ctr"/>
             <a:r>
-              <a:rPr sz="1600" b="1">
+              <a:rPr sz="1400" b="1">
                 <a:solidFill>
                   <a:srgbClr val="FFFFFF"/>
                 </a:solidFill>
@@ -19044,8 +15274,8 @@
         </p:nvSpPr>
         <p:spPr>
           <a:xfrm>
-            <a:off x="1450000" y="4680000"/>
-            <a:ext cx="10050000" cy="725000"/>
+            <a:off x="1380000" y="4500000"/>
+            <a:ext cx="10150000" cy="440000"/>
           </a:xfrm>
           <a:prstGeom prst="rect">
             <a:avLst/>
@@ -19053,14 +15283,13 @@
           <a:noFill/>
         </p:spPr>
         <p:txBody>
-          <a:bodyPr wrap="square" anchor="ctr" lIns="50800" rIns="50800">
+          <a:bodyPr wrap="square" anchor="ctr">
             <a:spAutoFit/>
           </a:bodyPr>
           <a:lstStyle/>
           <a:p>
-            <a:pPr algn="l"/>
             <a:r>
-              <a:rPr sz="1900" b="0">
+              <a:rPr sz="1600" b="0">
                 <a:solidFill>
                   <a:srgbClr val="1B2430"/>
                 </a:solidFill>
@@ -19079,8 +15308,8 @@
         </p:nvSpPr>
         <p:spPr>
           <a:xfrm>
-            <a:off x="550000" y="5525000"/>
-            <a:ext cx="11100000" cy="725000"/>
+            <a:off x="550000" y="5090000"/>
+            <a:ext cx="11100000" cy="520000"/>
           </a:xfrm>
           <a:prstGeom prst="roundRect">
             <a:avLst>
@@ -19125,8 +15354,8 @@
         </p:nvSpPr>
         <p:spPr>
           <a:xfrm>
-            <a:off x="550000" y="5525000"/>
-            <a:ext cx="70000" cy="725000"/>
+            <a:off x="550000" y="5090000"/>
+            <a:ext cx="70000" cy="520000"/>
           </a:xfrm>
           <a:prstGeom prst="rect">
             <a:avLst/>
@@ -19169,8 +15398,8 @@
         </p:nvSpPr>
         <p:spPr>
           <a:xfrm>
-            <a:off x="800000" y="5657500"/>
-            <a:ext cx="460000" cy="460000"/>
+            <a:off x="780000" y="5160000"/>
+            <a:ext cx="380000" cy="380000"/>
           </a:xfrm>
           <a:prstGeom prst="ellipse">
             <a:avLst/>
@@ -19203,7 +15432,7 @@
           <a:p>
             <a:pPr algn="ctr"/>
             <a:r>
-              <a:rPr sz="1600" b="1">
+              <a:rPr sz="1400" b="1">
                 <a:solidFill>
                   <a:srgbClr val="FFFFFF"/>
                 </a:solidFill>
@@ -19222,8 +15451,8 @@
         </p:nvSpPr>
         <p:spPr>
           <a:xfrm>
-            <a:off x="1450000" y="5525000"/>
-            <a:ext cx="10050000" cy="725000"/>
+            <a:off x="1380000" y="5130000"/>
+            <a:ext cx="10150000" cy="440000"/>
           </a:xfrm>
           <a:prstGeom prst="rect">
             <a:avLst/>
@@ -19231,14 +15460,13 @@
           <a:noFill/>
         </p:spPr>
         <p:txBody>
-          <a:bodyPr wrap="square" anchor="ctr" lIns="50800" rIns="50800">
+          <a:bodyPr wrap="square" anchor="ctr">
             <a:spAutoFit/>
           </a:bodyPr>
           <a:lstStyle/>
           <a:p>
-            <a:pPr algn="l"/>
             <a:r>
-              <a:rPr sz="1900" b="0">
+              <a:rPr sz="1600" b="0">
                 <a:solidFill>
                   <a:srgbClr val="1B2430"/>
                 </a:solidFill>
@@ -22787,12 +19015,12 @@
         </p:nvSpPr>
         <p:spPr>
           <a:xfrm>
-            <a:off x="550000" y="2076666"/>
-            <a:ext cx="11100000" cy="1250000"/>
+            <a:off x="550000" y="2384160"/>
+            <a:ext cx="11100000" cy="1335840"/>
           </a:xfrm>
           <a:prstGeom prst="roundRect">
             <a:avLst>
-              <a:gd name="adj" fmla="val 18000"/>
+              <a:gd name="adj" fmla="val 8000"/>
             </a:avLst>
           </a:prstGeom>
           <a:solidFill>
@@ -22833,8 +19061,8 @@
         </p:nvSpPr>
         <p:spPr>
           <a:xfrm>
-            <a:off x="550000" y="2076666"/>
-            <a:ext cx="70000" cy="1250000"/>
+            <a:off x="550000" y="2384160"/>
+            <a:ext cx="70000" cy="1335840"/>
           </a:xfrm>
           <a:prstGeom prst="rect">
             <a:avLst/>
@@ -22877,8 +19105,8 @@
         </p:nvSpPr>
         <p:spPr>
           <a:xfrm>
-            <a:off x="800000" y="2471666"/>
-            <a:ext cx="460000" cy="460000"/>
+            <a:off x="780000" y="2842080"/>
+            <a:ext cx="420000" cy="420000"/>
           </a:xfrm>
           <a:prstGeom prst="ellipse">
             <a:avLst/>
@@ -22911,7 +19139,7 @@
           <a:p>
             <a:pPr algn="ctr"/>
             <a:r>
-              <a:rPr sz="1600" b="1">
+              <a:rPr sz="1400" b="1">
                 <a:solidFill>
                   <a:srgbClr val="FFFFFF"/>
                 </a:solidFill>
@@ -22930,8 +19158,8 @@
         </p:nvSpPr>
         <p:spPr>
           <a:xfrm>
-            <a:off x="1450000" y="2076666"/>
-            <a:ext cx="10050000" cy="1250000"/>
+            <a:off x="1380000" y="2424160"/>
+            <a:ext cx="10150000" cy="1255840"/>
           </a:xfrm>
           <a:prstGeom prst="rect">
             <a:avLst/>
@@ -22939,20 +19167,35 @@
           <a:noFill/>
         </p:spPr>
         <p:txBody>
-          <a:bodyPr wrap="square" anchor="ctr" lIns="50800" rIns="50800">
+          <a:bodyPr wrap="square" anchor="ctr">
             <a:spAutoFit/>
           </a:bodyPr>
           <a:lstStyle/>
           <a:p>
-            <a:pPr algn="l"/>
             <a:r>
-              <a:rPr sz="1600" b="0">
+              <a:rPr sz="1600" b="1">
                 <a:solidFill>
-                  <a:srgbClr val="1B2430"/>
+                  <a:srgbClr val="1F3A5F"/>
                 </a:solidFill>
                 <a:latin typeface="Calibri"/>
               </a:rPr>
-              <a:t>SI uchun maxsus apparat vositalarini ixtisoslashuv darajasi va joylashuvi bo'yicha tasniflash qulay. Umumiy protsessor ichidagi bloklar — CPU dagi AMX/SVE, GPU dagi Tensor Core: dasturlanadigan mashina ichida matritsa buyrug'i; moslashuvchanlik saqlanadi,…</a:t>
+              <a:t>SI uchun maxsus apparat vositalarini ixtisoslashuv darajasi va joylashuvi bo'yicha tasniflash qulay.</a:t>
+            </a:r>
+          </a:p>
+          <a:p>
+            <a:pPr>
+              <a:spcBef>
+                <a:spcPts val="400"/>
+              </a:spcBef>
+            </a:pPr>
+            <a:r>
+              <a:rPr sz="1500">
+                <a:solidFill>
+                  <a:srgbClr val="334055"/>
+                </a:solidFill>
+                <a:latin typeface="Calibri"/>
+              </a:rPr>
+              <a:t>Umumiy protsessor ichidagi bloklar — CPU dagi AMX/SVE, GPU dagi Tensor Core: dasturlanadigan mashina ichida matritsa buyrug'i; moslashuvchanlik saqlanadi, samaradorlik oshadi.</a:t>
             </a:r>
           </a:p>
         </p:txBody>
@@ -22965,12 +19208,12 @@
         </p:nvSpPr>
         <p:spPr>
           <a:xfrm>
-            <a:off x="550000" y="3446666"/>
-            <a:ext cx="11100000" cy="1250000"/>
+            <a:off x="550000" y="3830000"/>
+            <a:ext cx="11100000" cy="1335840"/>
           </a:xfrm>
           <a:prstGeom prst="roundRect">
             <a:avLst>
-              <a:gd name="adj" fmla="val 18000"/>
+              <a:gd name="adj" fmla="val 8000"/>
             </a:avLst>
           </a:prstGeom>
           <a:solidFill>
@@ -23011,8 +19254,8 @@
         </p:nvSpPr>
         <p:spPr>
           <a:xfrm>
-            <a:off x="550000" y="3446666"/>
-            <a:ext cx="70000" cy="1250000"/>
+            <a:off x="550000" y="3830000"/>
+            <a:ext cx="70000" cy="1335840"/>
           </a:xfrm>
           <a:prstGeom prst="rect">
             <a:avLst/>
@@ -23055,8 +19298,8 @@
         </p:nvSpPr>
         <p:spPr>
           <a:xfrm>
-            <a:off x="800000" y="3841666"/>
-            <a:ext cx="460000" cy="460000"/>
+            <a:off x="780000" y="4287920"/>
+            <a:ext cx="420000" cy="420000"/>
           </a:xfrm>
           <a:prstGeom prst="ellipse">
             <a:avLst/>
@@ -23089,7 +19332,7 @@
           <a:p>
             <a:pPr algn="ctr"/>
             <a:r>
-              <a:rPr sz="1600" b="1">
+              <a:rPr sz="1400" b="1">
                 <a:solidFill>
                   <a:srgbClr val="FFFFFF"/>
                 </a:solidFill>
@@ -23108,8 +19351,8 @@
         </p:nvSpPr>
         <p:spPr>
           <a:xfrm>
-            <a:off x="1450000" y="3446666"/>
-            <a:ext cx="10050000" cy="1250000"/>
+            <a:off x="1380000" y="3870000"/>
+            <a:ext cx="10150000" cy="1255840"/>
           </a:xfrm>
           <a:prstGeom prst="rect">
             <a:avLst/>
@@ -23117,20 +19360,35 @@
           <a:noFill/>
         </p:spPr>
         <p:txBody>
-          <a:bodyPr wrap="square" anchor="ctr" lIns="50800" rIns="50800">
+          <a:bodyPr wrap="square" anchor="ctr">
             <a:spAutoFit/>
           </a:bodyPr>
           <a:lstStyle/>
           <a:p>
-            <a:pPr algn="l"/>
             <a:r>
-              <a:rPr sz="1600" b="0">
+              <a:rPr sz="1600" b="1">
                 <a:solidFill>
-                  <a:srgbClr val="1B2430"/>
+                  <a:srgbClr val="1F3A5F"/>
                 </a:solidFill>
                 <a:latin typeface="Calibri"/>
               </a:rPr>
               <a:t>Bu xilma-xillikni birlashtiruvchi narsa — barchasi Sze va hammualliflar [4] tavsiflagan bir xil loyihalash fazosida ishlaydi: hisoblash elementlari massivi (processing elements, PE), ular orasidagi ma'lumot oqimi (dataflow), ko'p darajali on-chip xotira…</a:t>
+            </a:r>
+          </a:p>
+          <a:p>
+            <a:pPr>
+              <a:spcBef>
+                <a:spcPts val="400"/>
+              </a:spcBef>
+            </a:pPr>
+            <a:r>
+              <a:rPr sz="1500">
+                <a:solidFill>
+                  <a:srgbClr val="334055"/>
+                </a:solidFill>
+                <a:latin typeface="Calibri"/>
+              </a:rPr>
+              <a:t>Farqlar — bu o'lchovlarning qaysi biriga urg'u berilganida.</a:t>
             </a:r>
           </a:p>
         </p:txBody>
@@ -25217,8 +21475,8 @@
         </p:nvSpPr>
         <p:spPr>
           <a:xfrm>
-            <a:off x="550000" y="1620000"/>
-            <a:ext cx="11100000" cy="1250000"/>
+            <a:off x="550000" y="2885000"/>
+            <a:ext cx="11100000" cy="520000"/>
           </a:xfrm>
           <a:prstGeom prst="roundRect">
             <a:avLst>
@@ -25263,8 +21521,8 @@
         </p:nvSpPr>
         <p:spPr>
           <a:xfrm>
-            <a:off x="550000" y="1620000"/>
-            <a:ext cx="70000" cy="1250000"/>
+            <a:off x="550000" y="2885000"/>
+            <a:ext cx="70000" cy="520000"/>
           </a:xfrm>
           <a:prstGeom prst="rect">
             <a:avLst/>
@@ -25307,8 +21565,8 @@
         </p:nvSpPr>
         <p:spPr>
           <a:xfrm>
-            <a:off x="800000" y="2015000"/>
-            <a:ext cx="460000" cy="460000"/>
+            <a:off x="780000" y="2955000"/>
+            <a:ext cx="380000" cy="380000"/>
           </a:xfrm>
           <a:prstGeom prst="ellipse">
             <a:avLst/>
@@ -25341,7 +21599,7 @@
           <a:p>
             <a:pPr algn="ctr"/>
             <a:r>
-              <a:rPr sz="1600" b="1">
+              <a:rPr sz="1400" b="1">
                 <a:solidFill>
                   <a:srgbClr val="FFFFFF"/>
                 </a:solidFill>
@@ -25360,8 +21618,8 @@
         </p:nvSpPr>
         <p:spPr>
           <a:xfrm>
-            <a:off x="1450000" y="1620000"/>
-            <a:ext cx="10050000" cy="1250000"/>
+            <a:off x="1380000" y="2925000"/>
+            <a:ext cx="10150000" cy="440000"/>
           </a:xfrm>
           <a:prstGeom prst="rect">
             <a:avLst/>
@@ -25369,12 +21627,11 @@
           <a:noFill/>
         </p:spPr>
         <p:txBody>
-          <a:bodyPr wrap="square" anchor="ctr" lIns="50800" rIns="50800">
+          <a:bodyPr wrap="square" anchor="ctr">
             <a:spAutoFit/>
           </a:bodyPr>
           <a:lstStyle/>
           <a:p>
-            <a:pPr algn="l"/>
             <a:r>
               <a:rPr sz="1600" b="0">
                 <a:solidFill>
@@ -25382,7 +21639,7 @@
                 </a:solidFill>
                 <a:latin typeface="Calibri"/>
               </a:rPr>
-              <a:t>Tensor Core — NVIDIA GPU ning SM i ichidagi matritsa ko'paytirish bloki. Oddiy CUDA yadrosi bir taktda bitta FMA (fused multiply-add) bajaradi; Tensor Core esa bitta buyruqda kichik matritsa amalini D = A × B + C bajaradi, bu yerda A va B past aniqlikda…</a:t>
+              <a:t>Tensor Core — NVIDIA GPU ning SM i ichidagi matritsa ko'paytirish bloki.</a:t>
             </a:r>
           </a:p>
         </p:txBody>
@@ -25395,8 +21652,8 @@
         </p:nvSpPr>
         <p:spPr>
           <a:xfrm>
-            <a:off x="550000" y="2990000"/>
-            <a:ext cx="11100000" cy="1250000"/>
+            <a:off x="550000" y="3515000"/>
+            <a:ext cx="11100000" cy="520000"/>
           </a:xfrm>
           <a:prstGeom prst="roundRect">
             <a:avLst>
@@ -25441,8 +21698,8 @@
         </p:nvSpPr>
         <p:spPr>
           <a:xfrm>
-            <a:off x="550000" y="2990000"/>
-            <a:ext cx="70000" cy="1250000"/>
+            <a:off x="550000" y="3515000"/>
+            <a:ext cx="70000" cy="520000"/>
           </a:xfrm>
           <a:prstGeom prst="rect">
             <a:avLst/>
@@ -25485,8 +21742,8 @@
         </p:nvSpPr>
         <p:spPr>
           <a:xfrm>
-            <a:off x="800000" y="3385000"/>
-            <a:ext cx="460000" cy="460000"/>
+            <a:off x="780000" y="3585000"/>
+            <a:ext cx="380000" cy="380000"/>
           </a:xfrm>
           <a:prstGeom prst="ellipse">
             <a:avLst/>
@@ -25519,7 +21776,7 @@
           <a:p>
             <a:pPr algn="ctr"/>
             <a:r>
-              <a:rPr sz="1600" b="1">
+              <a:rPr sz="1400" b="1">
                 <a:solidFill>
                   <a:srgbClr val="FFFFFF"/>
                 </a:solidFill>
@@ -25538,8 +21795,8 @@
         </p:nvSpPr>
         <p:spPr>
           <a:xfrm>
-            <a:off x="1450000" y="2990000"/>
-            <a:ext cx="10050000" cy="1250000"/>
+            <a:off x="1380000" y="3555000"/>
+            <a:ext cx="10150000" cy="440000"/>
           </a:xfrm>
           <a:prstGeom prst="rect">
             <a:avLst/>
@@ -25547,12 +21804,11 @@
           <a:noFill/>
         </p:spPr>
         <p:txBody>
-          <a:bodyPr wrap="square" anchor="ctr" lIns="50800" rIns="50800">
+          <a:bodyPr wrap="square" anchor="ctr">
             <a:spAutoFit/>
           </a:bodyPr>
           <a:lstStyle/>
           <a:p>
-            <a:pPr algn="l"/>
             <a:r>
               <a:rPr sz="1600" b="0">
                 <a:solidFill>
@@ -25560,7 +21816,7 @@
                 </a:solidFill>
                 <a:latin typeface="Calibri"/>
               </a:rPr>
-              <a:t>Jadvaldagi TF32 (TensorFloat-32) alohida izohga loyiq: bu 19-bitli format (8 bit eksponenta FP32 kabi, 10 bit mantissa FP16 kabi) bo'lib, FP32 kirish ma'lumotini kod o'zgartirmasdan Tensor Core da hisoblash imkonini beradi — A100 da 19,5 ga qarshi 156 TFLOPS.…</a:t>
+              <a:t>Jadvaldagi TF32 (TensorFloat-32) alohida izohga loyiq: bu 19-bitli format (8 bit eksponenta FP32 kabi, 10 bit mantissa FP16 kabi) bo'lib, FP32 kirish ma'lumotini kod o'zgartirmasdan Tensor Core da hisoblash imkonini beradi — A100 da 19,5 ga qarshi 156 TFLOPS.</a:t>
             </a:r>
           </a:p>
         </p:txBody>
@@ -25573,8 +21829,8 @@
         </p:nvSpPr>
         <p:spPr>
           <a:xfrm>
-            <a:off x="550000" y="4360000"/>
-            <a:ext cx="11100000" cy="1250000"/>
+            <a:off x="550000" y="4145000"/>
+            <a:ext cx="11100000" cy="520000"/>
           </a:xfrm>
           <a:prstGeom prst="roundRect">
             <a:avLst>
@@ -25619,8 +21875,8 @@
         </p:nvSpPr>
         <p:spPr>
           <a:xfrm>
-            <a:off x="550000" y="4360000"/>
-            <a:ext cx="70000" cy="1250000"/>
+            <a:off x="550000" y="4145000"/>
+            <a:ext cx="70000" cy="520000"/>
           </a:xfrm>
           <a:prstGeom prst="rect">
             <a:avLst/>
@@ -25663,8 +21919,8 @@
         </p:nvSpPr>
         <p:spPr>
           <a:xfrm>
-            <a:off x="800000" y="4755000"/>
-            <a:ext cx="460000" cy="460000"/>
+            <a:off x="780000" y="4215000"/>
+            <a:ext cx="380000" cy="380000"/>
           </a:xfrm>
           <a:prstGeom prst="ellipse">
             <a:avLst/>
@@ -25697,7 +21953,7 @@
           <a:p>
             <a:pPr algn="ctr"/>
             <a:r>
-              <a:rPr sz="1600" b="1">
+              <a:rPr sz="1400" b="1">
                 <a:solidFill>
                   <a:srgbClr val="FFFFFF"/>
                 </a:solidFill>
@@ -25716,8 +21972,8 @@
         </p:nvSpPr>
         <p:spPr>
           <a:xfrm>
-            <a:off x="1450000" y="4360000"/>
-            <a:ext cx="10050000" cy="1250000"/>
+            <a:off x="1380000" y="4185000"/>
+            <a:ext cx="10150000" cy="440000"/>
           </a:xfrm>
           <a:prstGeom prst="rect">
             <a:avLst/>
@@ -25725,12 +21981,11 @@
           <a:noFill/>
         </p:spPr>
         <p:txBody>
-          <a:bodyPr wrap="square" anchor="ctr" lIns="50800" rIns="50800">
+          <a:bodyPr wrap="square" anchor="ctr">
             <a:spAutoFit/>
           </a:bodyPr>
           <a:lstStyle/>
           <a:p>
-            <a:pPr algn="l"/>
             <a:r>
               <a:rPr sz="1600" b="0">
                 <a:solidFill>
@@ -29235,12 +25490,12 @@
         </p:nvSpPr>
         <p:spPr>
           <a:xfrm>
-            <a:off x="550000" y="1300000"/>
-            <a:ext cx="11100000" cy="1147500"/>
+            <a:off x="550000" y="1250000"/>
+            <a:ext cx="11100000" cy="1180000"/>
           </a:xfrm>
           <a:prstGeom prst="roundRect">
             <a:avLst>
-              <a:gd name="adj" fmla="val 18000"/>
+              <a:gd name="adj" fmla="val 8000"/>
             </a:avLst>
           </a:prstGeom>
           <a:solidFill>
@@ -29281,8 +25536,8 @@
         </p:nvSpPr>
         <p:spPr>
           <a:xfrm>
-            <a:off x="550000" y="1300000"/>
-            <a:ext cx="70000" cy="1147500"/>
+            <a:off x="550000" y="1250000"/>
+            <a:ext cx="70000" cy="1180000"/>
           </a:xfrm>
           <a:prstGeom prst="rect">
             <a:avLst/>
@@ -29325,8 +25580,8 @@
         </p:nvSpPr>
         <p:spPr>
           <a:xfrm>
-            <a:off x="800000" y="1643750"/>
-            <a:ext cx="460000" cy="460000"/>
+            <a:off x="780000" y="1630000"/>
+            <a:ext cx="420000" cy="420000"/>
           </a:xfrm>
           <a:prstGeom prst="ellipse">
             <a:avLst/>
@@ -29359,7 +25614,7 @@
           <a:p>
             <a:pPr algn="ctr"/>
             <a:r>
-              <a:rPr sz="1600" b="1">
+              <a:rPr sz="1400" b="1">
                 <a:solidFill>
                   <a:srgbClr val="FFFFFF"/>
                 </a:solidFill>
@@ -29378,8 +25633,8 @@
         </p:nvSpPr>
         <p:spPr>
           <a:xfrm>
-            <a:off x="1450000" y="1300000"/>
-            <a:ext cx="10050000" cy="1147500"/>
+            <a:off x="1380000" y="1290000"/>
+            <a:ext cx="10150000" cy="1100000"/>
           </a:xfrm>
           <a:prstGeom prst="rect">
             <a:avLst/>
@@ -29387,22 +25642,37 @@
           <a:noFill/>
         </p:spPr>
         <p:txBody>
-          <a:bodyPr wrap="square" anchor="ctr" lIns="50800" rIns="50800">
+          <a:bodyPr wrap="square" anchor="ctr">
             <a:spAutoFit/>
           </a:bodyPr>
           <a:lstStyle/>
           <a:p>
-            <a:pPr algn="l"/>
             <a:r>
-              <a:rPr sz="1400" b="0">
+              <a:rPr sz="1500" b="1">
                 <a:solidFill>
-                  <a:srgbClr val="1B2430"/>
+                  <a:srgbClr val="1F3A5F"/>
                 </a:solidFill>
                 <a:latin typeface="Calibri"/>
               </a:rPr>
               <a:t>ASIC (Application-Specific Integrated Circuit) va FPGA — ixtisoslashuvning ikki yo'li: biri kremniyda qotirilgan, ikkinchisi qayta dasturlanadigan.</a:t>
             </a:r>
           </a:p>
+          <a:p>
+            <a:pPr>
+              <a:spcBef>
+                <a:spcPts val="400"/>
+              </a:spcBef>
+            </a:pPr>
+            <a:r>
+              <a:rPr sz="1400">
+                <a:solidFill>
+                  <a:srgbClr val="334055"/>
+                </a:solidFill>
+                <a:latin typeface="Calibri"/>
+              </a:rPr>
+              <a:t>Ularni to'g'ri taqqoslash uchun loyihalash oqimini bilish kerak.</a:t>
+            </a:r>
+          </a:p>
         </p:txBody>
       </p:sp>
       <p:sp>
@@ -29413,12 +25683,12 @@
         </p:nvSpPr>
         <p:spPr>
           <a:xfrm>
-            <a:off x="550000" y="2567500"/>
-            <a:ext cx="11100000" cy="1147500"/>
+            <a:off x="550000" y="2540000"/>
+            <a:ext cx="11100000" cy="1180000"/>
           </a:xfrm>
           <a:prstGeom prst="roundRect">
             <a:avLst>
-              <a:gd name="adj" fmla="val 18000"/>
+              <a:gd name="adj" fmla="val 8000"/>
             </a:avLst>
           </a:prstGeom>
           <a:solidFill>
@@ -29459,8 +25729,8 @@
         </p:nvSpPr>
         <p:spPr>
           <a:xfrm>
-            <a:off x="550000" y="2567500"/>
-            <a:ext cx="70000" cy="1147500"/>
+            <a:off x="550000" y="2540000"/>
+            <a:ext cx="70000" cy="1180000"/>
           </a:xfrm>
           <a:prstGeom prst="rect">
             <a:avLst/>
@@ -29503,8 +25773,8 @@
         </p:nvSpPr>
         <p:spPr>
           <a:xfrm>
-            <a:off x="800000" y="2911250"/>
-            <a:ext cx="460000" cy="460000"/>
+            <a:off x="780000" y="2920000"/>
+            <a:ext cx="420000" cy="420000"/>
           </a:xfrm>
           <a:prstGeom prst="ellipse">
             <a:avLst/>
@@ -29537,7 +25807,7 @@
           <a:p>
             <a:pPr algn="ctr"/>
             <a:r>
-              <a:rPr sz="1600" b="1">
+              <a:rPr sz="1400" b="1">
                 <a:solidFill>
                   <a:srgbClr val="FFFFFF"/>
                 </a:solidFill>
@@ -29556,8 +25826,8 @@
         </p:nvSpPr>
         <p:spPr>
           <a:xfrm>
-            <a:off x="1450000" y="2567500"/>
-            <a:ext cx="10050000" cy="1147500"/>
+            <a:off x="1380000" y="2580000"/>
+            <a:ext cx="10150000" cy="1100000"/>
           </a:xfrm>
           <a:prstGeom prst="rect">
             <a:avLst/>
@@ -29565,20 +25835,35 @@
           <a:noFill/>
         </p:spPr>
         <p:txBody>
-          <a:bodyPr wrap="square" anchor="ctr" lIns="50800" rIns="50800">
+          <a:bodyPr wrap="square" anchor="ctr">
             <a:spAutoFit/>
           </a:bodyPr>
           <a:lstStyle/>
           <a:p>
-            <a:pPr algn="l"/>
             <a:r>
-              <a:rPr sz="1400" b="0">
+              <a:rPr sz="1500" b="1">
                 <a:solidFill>
-                  <a:srgbClr val="1B2430"/>
+                  <a:srgbClr val="1F3A5F"/>
                 </a:solidFill>
                 <a:latin typeface="Calibri"/>
               </a:rPr>
-              <a:t>ASIC loyihalash oqimi quyidagi bosqichlardan iborat: spetsifikatsiya (yuk tahlili, unumdorlik/energiya/maydon maqsadlari) → arxitektura (PE massivi o'lchami, xotira hajmi, ma'lumot oqimi;…</a:t>
+              <a:t>ASIC loyihalash oqimi quyidagi bosqichlardan iborat: spetsifikatsiya (yuk tahlili, unumdorlik/energiya/maydon maqsadlari) → arxitektura (PE massivi o'lchami, xotira hajmi, ma'lumot oqimi; odatda tezkor simulyator va analitik modellar bilan) → RTL loyihalash…</a:t>
+            </a:r>
+          </a:p>
+          <a:p>
+            <a:pPr>
+              <a:spcBef>
+                <a:spcPts val="400"/>
+              </a:spcBef>
+            </a:pPr>
+            <a:r>
+              <a:rPr sz="1400">
+                <a:solidFill>
+                  <a:srgbClr val="334055"/>
+                </a:solidFill>
+                <a:latin typeface="Calibri"/>
+              </a:rPr>
+              <a:t>Butun sikl 18–36 oy, xarajat ilg'or jarayonda yuz millionlab dollar.</a:t>
             </a:r>
           </a:p>
         </p:txBody>
@@ -29591,12 +25876,12 @@
         </p:nvSpPr>
         <p:spPr>
           <a:xfrm>
-            <a:off x="550000" y="3835000"/>
-            <a:ext cx="11100000" cy="1147500"/>
+            <a:off x="550000" y="3830000"/>
+            <a:ext cx="11100000" cy="1180000"/>
           </a:xfrm>
           <a:prstGeom prst="roundRect">
             <a:avLst>
-              <a:gd name="adj" fmla="val 18000"/>
+              <a:gd name="adj" fmla="val 8000"/>
             </a:avLst>
           </a:prstGeom>
           <a:solidFill>
@@ -29637,8 +25922,8 @@
         </p:nvSpPr>
         <p:spPr>
           <a:xfrm>
-            <a:off x="550000" y="3835000"/>
-            <a:ext cx="70000" cy="1147500"/>
+            <a:off x="550000" y="3830000"/>
+            <a:ext cx="70000" cy="1180000"/>
           </a:xfrm>
           <a:prstGeom prst="rect">
             <a:avLst/>
@@ -29681,8 +25966,8 @@
         </p:nvSpPr>
         <p:spPr>
           <a:xfrm>
-            <a:off x="800000" y="4178750"/>
-            <a:ext cx="460000" cy="460000"/>
+            <a:off x="780000" y="4210000"/>
+            <a:ext cx="420000" cy="420000"/>
           </a:xfrm>
           <a:prstGeom prst="ellipse">
             <a:avLst/>
@@ -29715,7 +26000,7 @@
           <a:p>
             <a:pPr algn="ctr"/>
             <a:r>
-              <a:rPr sz="1600" b="1">
+              <a:rPr sz="1400" b="1">
                 <a:solidFill>
                   <a:srgbClr val="FFFFFF"/>
                 </a:solidFill>
@@ -29734,8 +26019,8 @@
         </p:nvSpPr>
         <p:spPr>
           <a:xfrm>
-            <a:off x="1450000" y="3835000"/>
-            <a:ext cx="10050000" cy="1147500"/>
+            <a:off x="1380000" y="3870000"/>
+            <a:ext cx="10150000" cy="1100000"/>
           </a:xfrm>
           <a:prstGeom prst="rect">
             <a:avLst/>
@@ -29743,22 +26028,37 @@
           <a:noFill/>
         </p:spPr>
         <p:txBody>
-          <a:bodyPr wrap="square" anchor="ctr" lIns="50800" rIns="50800">
+          <a:bodyPr wrap="square" anchor="ctr">
             <a:spAutoFit/>
           </a:bodyPr>
           <a:lstStyle/>
           <a:p>
-            <a:pPr algn="l"/>
             <a:r>
-              <a:rPr sz="1400" b="0">
+              <a:rPr sz="1500" b="1">
                 <a:solidFill>
-                  <a:srgbClr val="1B2430"/>
+                  <a:srgbClr val="1F3A5F"/>
                 </a:solidFill>
                 <a:latin typeface="Calibri"/>
               </a:rPr>
               <a:t>FPGA oqimi qisqaroq: RTL yoki HLS (C/C++ dan sintez) → sintez → joylashtirish va trassalash (soatlar) → bitstream yuklash (soniyalar).</a:t>
             </a:r>
           </a:p>
+          <a:p>
+            <a:pPr>
+              <a:spcBef>
+                <a:spcPts val="400"/>
+              </a:spcBef>
+            </a:pPr>
+            <a:r>
+              <a:rPr sz="1400">
+                <a:solidFill>
+                  <a:srgbClr val="334055"/>
+                </a:solidFill>
+                <a:latin typeface="Calibri"/>
+              </a:rPr>
+              <a:t>Xato topilsa, qayta sintez qilinadi — tape-out yo'q.</a:t>
+            </a:r>
+          </a:p>
         </p:txBody>
       </p:sp>
       <p:sp>
@@ -29769,12 +26069,12 @@
         </p:nvSpPr>
         <p:spPr>
           <a:xfrm>
-            <a:off x="550000" y="5102500"/>
-            <a:ext cx="11100000" cy="1147500"/>
+            <a:off x="550000" y="5120000"/>
+            <a:ext cx="11100000" cy="1180000"/>
           </a:xfrm>
           <a:prstGeom prst="roundRect">
             <a:avLst>
-              <a:gd name="adj" fmla="val 18000"/>
+              <a:gd name="adj" fmla="val 8000"/>
             </a:avLst>
           </a:prstGeom>
           <a:solidFill>
@@ -29815,8 +26115,8 @@
         </p:nvSpPr>
         <p:spPr>
           <a:xfrm>
-            <a:off x="550000" y="5102500"/>
-            <a:ext cx="70000" cy="1147500"/>
+            <a:off x="550000" y="5120000"/>
+            <a:ext cx="70000" cy="1180000"/>
           </a:xfrm>
           <a:prstGeom prst="rect">
             <a:avLst/>
@@ -29859,8 +26159,8 @@
         </p:nvSpPr>
         <p:spPr>
           <a:xfrm>
-            <a:off x="800000" y="5446250"/>
-            <a:ext cx="460000" cy="460000"/>
+            <a:off x="780000" y="5500000"/>
+            <a:ext cx="420000" cy="420000"/>
           </a:xfrm>
           <a:prstGeom prst="ellipse">
             <a:avLst/>
@@ -29893,7 +26193,7 @@
           <a:p>
             <a:pPr algn="ctr"/>
             <a:r>
-              <a:rPr sz="1600" b="1">
+              <a:rPr sz="1400" b="1">
                 <a:solidFill>
                   <a:srgbClr val="FFFFFF"/>
                 </a:solidFill>
@@ -29912,8 +26212,8 @@
         </p:nvSpPr>
         <p:spPr>
           <a:xfrm>
-            <a:off x="1450000" y="5102500"/>
-            <a:ext cx="10050000" cy="1147500"/>
+            <a:off x="1380000" y="5160000"/>
+            <a:ext cx="10150000" cy="1100000"/>
           </a:xfrm>
           <a:prstGeom prst="rect">
             <a:avLst/>
@@ -29921,20 +26221,35 @@
           <a:noFill/>
         </p:spPr>
         <p:txBody>
-          <a:bodyPr wrap="square" anchor="ctr" lIns="50800" rIns="50800">
+          <a:bodyPr wrap="square" anchor="ctr">
             <a:spAutoFit/>
           </a:bodyPr>
           <a:lstStyle/>
           <a:p>
-            <a:pPr algn="l"/>
             <a:r>
-              <a:rPr sz="1400" b="0">
+              <a:rPr sz="1500" b="1">
                 <a:solidFill>
-                  <a:srgbClr val="1B2430"/>
+                  <a:srgbClr val="1F3A5F"/>
                 </a:solidFill>
                 <a:latin typeface="Calibri"/>
               </a:rPr>
-              <a:t>Amaliy qoida: tiraj kichik, kechikish qattiq va kiritish-chiqarish nostandart bo'lsa — FPGA; tiraj millionlab va yuk barqaror bo'lsa — ASIC; yuk tez o'zgaradigan va ekotizim muhim bo'lsa —…</a:t>
+              <a:t>Amaliy qoida: tiraj kichik, kechikish qattiq va kiritish-chiqarish nostandart bo'lsa — FPGA; tiraj millionlab va yuk barqaror bo'lsa — ASIC; yuk tez o'zgaradigan va ekotizim muhim bo'lsa — GPU.</a:t>
+            </a:r>
+          </a:p>
+          <a:p>
+            <a:pPr>
+              <a:spcBef>
+                <a:spcPts val="400"/>
+              </a:spcBef>
+            </a:pPr>
+            <a:r>
+              <a:rPr sz="1400">
+                <a:solidFill>
+                  <a:srgbClr val="334055"/>
+                </a:solidFill>
+                <a:latin typeface="Calibri"/>
+              </a:rPr>
+              <a:t>Ko'pincha FPGA ASIC uchun prototip bosqichi vazifasini ham bajaradi: arxitektura FPGA da tekshiriladi, so'ng kremniyga o'tkaziladi.</a:t>
             </a:r>
           </a:p>
         </p:txBody>
